--- a/kvcache/unified_kv_memory/立项汇报PPTX/关键技术汇报_20260910/统一异构KVCache存储池_关键技术汇报_初稿_预审版_20260910.pptx
+++ b/kvcache/unified_kv_memory/立项汇报PPTX/关键技术汇报_20260910/统一异构KVCache存储池_关键技术汇报_初稿_预审版_20260910.pptx
@@ -13,6 +13,7 @@
     <p:sldId id="261" r:id="rId13"/>
     <p:sldId id="262" r:id="rId14"/>
     <p:sldId id="263" r:id="rId15"/>
+    <p:sldId id="264" r:id="rId16"/>
   </p:sldIdLst>
   <p:sldSz cx="12191695" cy="6858000" type="screen4x3"/>
   <p:notesSz cx="6858000" cy="9144000"/>
@@ -992,6 +993,72 @@
 </p:notes>
 </file>
 
+<file path=ppt/notesSlides/notesSlide9.xml><?xml version="1.0" encoding="utf-8"?>
+<p:notes xmlns:a="http://schemas.openxmlformats.org/drawingml/2006/main" xmlns:p="http://schemas.openxmlformats.org/presentationml/2006/main" xmlns:r="http://schemas.openxmlformats.org/officeDocument/2006/relationships">
+  <p:cSld>
+    <p:spTree>
+      <p:nvGrpSpPr>
+        <p:cNvPr id="1" name=""/>
+        <p:cNvGrpSpPr/>
+        <p:nvPr/>
+      </p:nvGrpSpPr>
+      <p:grpSpPr>
+        <a:xfrm>
+          <a:off x="0" y="0"/>
+          <a:ext cx="0" cy="0"/>
+          <a:chOff x="0" y="0"/>
+          <a:chExt cx="0" cy="0"/>
+        </a:xfrm>
+      </p:grpSpPr>
+      <p:sp>
+        <p:nvSpPr>
+          <p:cNvPr id="2" name="Slide Image Placeholder 1"/>
+          <p:cNvSpPr>
+            <a:spLocks noGrp="1"/>
+          </p:cNvSpPr>
+          <p:nvPr>
+            <p:ph type="sldImg" idx="2"/>
+          </p:nvPr>
+        </p:nvSpPr>
+        <p:spPr/>
+      </p:sp>
+      <p:sp>
+        <p:nvSpPr>
+          <p:cNvPr id="3" name="Notes Placeholder 2"/>
+          <p:cNvSpPr>
+            <a:spLocks noGrp="1"/>
+          </p:cNvSpPr>
+          <p:nvPr>
+            <p:ph type="body" idx="3" sz="quarter"/>
+          </p:nvPr>
+        </p:nvSpPr>
+        <p:spPr/>
+        <p:txBody>
+          <a:bodyPr/>
+          <a:lstStyle/>
+          <a:p/>
+        </p:txBody>
+      </p:sp>
+      <p:sp>
+        <p:nvSpPr>
+          <p:cNvPr id="4" name="Slide Number Placeholder 3"/>
+          <p:cNvSpPr>
+            <a:spLocks noGrp="1"/>
+          </p:cNvSpPr>
+          <p:nvPr>
+            <p:ph type="sldNum" idx="5" sz="quarter"/>
+          </p:nvPr>
+        </p:nvSpPr>
+        <p:spPr/>
+      </p:sp>
+    </p:spTree>
+  </p:cSld>
+  <p:clrMapOvr>
+    <a:masterClrMapping/>
+  </p:clrMapOvr>
+</p:notes>
+</file>
+
 <file path=ppt/slideLayouts/slideLayout1.xml><?xml version="1.0" encoding="utf-8"?>
 <p:sldLayout xmlns:a="http://schemas.openxmlformats.org/drawingml/2006/main" xmlns:r="http://schemas.openxmlformats.org/officeDocument/2006/relationships" xmlns:p="http://schemas.openxmlformats.org/presentationml/2006/main" type="title" preserve="1">
   <p:cSld name="Title Slide">
@@ -4647,7 +4714,7 @@
               </a:defRPr>
             </a:pPr>
             <a:r>
-              <a:t>02 / 08</a:t>
+              <a:t>02 / 09</a:t>
             </a:r>
           </a:p>
         </p:txBody>
@@ -6944,7 +7011,7 @@
               </a:defRPr>
             </a:pPr>
             <a:r>
-              <a:t>03 / 08</a:t>
+              <a:t>03 / 09</a:t>
             </a:r>
           </a:p>
         </p:txBody>
@@ -9992,7 +10059,7 @@
               </a:defRPr>
             </a:pPr>
             <a:r>
-              <a:t>04 / 08</a:t>
+              <a:t>04 / 09</a:t>
             </a:r>
           </a:p>
         </p:txBody>
@@ -13474,7 +13541,7 @@
               </a:defRPr>
             </a:pPr>
             <a:r>
-              <a:t>05 / 08</a:t>
+              <a:t>05 / 09</a:t>
             </a:r>
           </a:p>
         </p:txBody>
@@ -15427,7 +15494,7 @@
               </a:defRPr>
             </a:pPr>
             <a:r>
-              <a:t>硬件实验环境差距分析与受限项理论建模打样</a:t>
+              <a:t>元数据处理时延优化的价值场景建模与理论性能推导</a:t>
             </a:r>
           </a:p>
         </p:txBody>
@@ -15463,7 +15530,7 @@
               </a:defRPr>
             </a:pPr>
             <a:r>
-              <a:t>以计算机体系结构第一性原理严密建模，推导典型模型在三大指标上的量化收益</a:t>
+              <a:t>基于关键路径占比 (CMR) 与服务利用率 (ρ) 双维模型，推导高利用率下吞吐与 P99 改善，并引入 NVIDIA 工业实测副证</a:t>
             </a:r>
           </a:p>
         </p:txBody>
@@ -15499,7 +15566,7 @@
               </a:defRPr>
             </a:pPr>
             <a:r>
-              <a:t>06 / 08</a:t>
+              <a:t>06 / 09</a:t>
             </a:r>
           </a:p>
         </p:txBody>
@@ -15513,172 +15580,7 @@
         <p:spPr>
           <a:xfrm>
             <a:off x="548640" y="1051560"/>
-            <a:ext cx="11091672" cy="960120"/>
-          </a:xfrm>
-          <a:prstGeom prst="roundRect">
-            <a:avLst>
-              <a:gd name="adj" fmla="val 2000"/>
-            </a:avLst>
-          </a:prstGeom>
-          <a:solidFill>
-            <a:srgbClr val="FFF0F0"/>
-          </a:solidFill>
-          <a:ln>
-            <a:noFill/>
-          </a:ln>
-        </p:spPr>
-        <p:style>
-          <a:lnRef idx="1">
-            <a:schemeClr val="accent1"/>
-          </a:lnRef>
-          <a:fillRef idx="3">
-            <a:schemeClr val="accent1"/>
-          </a:fillRef>
-          <a:effectRef idx="2">
-            <a:schemeClr val="accent1"/>
-          </a:effectRef>
-          <a:fontRef idx="minor">
-            <a:schemeClr val="lt1"/>
-          </a:fontRef>
-        </p:style>
-        <p:txBody>
-          <a:bodyPr rtlCol="0" anchor="ctr"/>
-          <a:lstStyle/>
-          <a:p>
-            <a:pPr algn="ctr"/>
-          </a:p>
-        </p:txBody>
-      </p:sp>
-      <p:sp>
-        <p:nvSpPr>
-          <p:cNvPr id="6" name="TextBox 5"/>
-          <p:cNvSpPr txBox="1"/>
-          <p:nvPr/>
-        </p:nvSpPr>
-        <p:spPr>
-          <a:xfrm>
-            <a:off x="685800" y="1078992"/>
-            <a:ext cx="10817352" cy="896112"/>
-          </a:xfrm>
-          <a:prstGeom prst="rect">
-            <a:avLst/>
-          </a:prstGeom>
-          <a:noFill/>
-        </p:spPr>
-        <p:txBody>
-          <a:bodyPr wrap="square">
-            <a:spAutoFit/>
-          </a:bodyPr>
-          <a:lstStyle/>
-          <a:p>
-            <a:pPr>
-              <a:defRPr sz="1100" b="1">
-                <a:solidFill>
-                  <a:srgbClr val="A01414"/>
-                </a:solidFill>
-                <a:latin typeface="Microsoft YaHei"/>
-              </a:defRPr>
-            </a:pPr>
-            <a:r>
-              <a:t>【硬件实验环境现状与客观差距结论】</a:t>
-            </a:r>
-          </a:p>
-          <a:p>
-            <a:pPr>
-              <a:lnSpc>
-                <a:spcPct val="120000"/>
-              </a:lnSpc>
-              <a:spcBef>
-                <a:spcPts val="380"/>
-              </a:spcBef>
-            </a:pPr>
-            <a:r>
-              <a:rPr sz="900" b="1">
-                <a:solidFill>
-                  <a:srgbClr val="1A2533"/>
-                </a:solidFill>
-                <a:latin typeface="Microsoft YaHei"/>
-              </a:rPr>
-              <a:t>• 当前已有环境： </a:t>
-            </a:r>
-            <a:r>
-              <a:rPr sz="900">
-                <a:solidFill>
-                  <a:srgbClr val="1A2533"/>
-                </a:solidFill>
-                <a:latin typeface="Microsoft YaHei"/>
-              </a:rPr>
-              <a:t>通用 Host CPU 主机、虚拟内存与单机网络仿真环境，仅支持开展 Host 间通信协议与控制面元数据处理验证（如前缀匹配表提升 &gt;30% 实测）。</a:t>
-            </a:r>
-          </a:p>
-          <a:p>
-            <a:pPr>
-              <a:lnSpc>
-                <a:spcPct val="120000"/>
-              </a:lnSpc>
-              <a:spcBef>
-                <a:spcPts val="380"/>
-              </a:spcBef>
-            </a:pPr>
-            <a:r>
-              <a:rPr sz="900" b="1">
-                <a:solidFill>
-                  <a:srgbClr val="1A2533"/>
-                </a:solidFill>
-                <a:latin typeface="Microsoft YaHei"/>
-              </a:rPr>
-              <a:t>• 当前缺失环境： </a:t>
-            </a:r>
-            <a:r>
-              <a:rPr sz="900">
-                <a:solidFill>
-                  <a:srgbClr val="1A2533"/>
-                </a:solidFill>
-                <a:latin typeface="Microsoft YaHei"/>
-              </a:rPr>
-              <a:t>缺乏国产高性能计算卡（NPU 高带宽显存 HBM）、缺乏真实 TP=8 多卡拓扑、设备级 DMA 通道与高阶 QoS 交换机。</a:t>
-            </a:r>
-          </a:p>
-          <a:p>
-            <a:pPr>
-              <a:lnSpc>
-                <a:spcPct val="120000"/>
-              </a:lnSpc>
-              <a:spcBef>
-                <a:spcPts val="380"/>
-              </a:spcBef>
-            </a:pPr>
-            <a:r>
-              <a:rPr sz="900" b="1">
-                <a:solidFill>
-                  <a:srgbClr val="1A2533"/>
-                </a:solidFill>
-                <a:latin typeface="Microsoft YaHei"/>
-              </a:rPr>
-              <a:t>• 推进策略结论： </a:t>
-            </a:r>
-            <a:r>
-              <a:rPr sz="900">
-                <a:solidFill>
-                  <a:srgbClr val="1A2533"/>
-                </a:solidFill>
-                <a:latin typeface="Microsoft YaHei"/>
-              </a:rPr>
-              <a:t>涉及数据面计算-搬运流水、前后台真实混压等项，硬件环境客观不满足物理闭环条件。在环境就绪前，先通过第一性原理严密建模预估收益边界。</a:t>
-            </a:r>
-          </a:p>
-        </p:txBody>
-      </p:sp>
-      <p:sp>
-        <p:nvSpPr>
-          <p:cNvPr id="7" name="Rounded Rectangle 6"/>
-          <p:cNvSpPr/>
-          <p:nvPr/>
-        </p:nvSpPr>
-        <p:spPr>
-          <a:xfrm>
-            <a:off x="548640" y="2121408"/>
-            <a:ext cx="3593592" cy="4114800"/>
+            <a:ext cx="5897880" cy="2542032"/>
           </a:xfrm>
           <a:prstGeom prst="roundRect">
             <a:avLst>
@@ -15716,14 +15618,14 @@
       </p:sp>
       <p:sp>
         <p:nvSpPr>
-          <p:cNvPr id="8" name="TextBox 7"/>
+          <p:cNvPr id="6" name="TextBox 5"/>
           <p:cNvSpPr txBox="1"/>
           <p:nvPr/>
         </p:nvSpPr>
         <p:spPr>
           <a:xfrm>
-            <a:off x="676656" y="2231136"/>
-            <a:ext cx="3337560" cy="3895344"/>
+            <a:off x="676656" y="1124712"/>
+            <a:ext cx="5641848" cy="384048"/>
           </a:xfrm>
           <a:prstGeom prst="rect">
             <a:avLst/>
@@ -15745,203 +15647,151 @@
               </a:defRPr>
             </a:pPr>
             <a:r>
-              <a:t>打样一：基于 UB 技术的元数据检索与并发控制（缩短 TTFT）</a:t>
-            </a:r>
-          </a:p>
+              <a:t>【价值区域一】高利用率 + 高 CMR（32K / 200GB/s 聚合拉取 / 短 TTFT）</a:t>
+            </a:r>
+          </a:p>
+          <a:p>
+            <a:pPr>
+              <a:spcBef>
+                <a:spcPts val="150"/>
+              </a:spcBef>
+              <a:defRPr sz="850" b="1">
+                <a:solidFill>
+                  <a:srgbClr val="2D63B8"/>
+                </a:solidFill>
+                <a:latin typeface="Microsoft YaHei"/>
+              </a:defRPr>
+            </a:pPr>
+            <a:r>
+              <a:t>基线场景一：32K Tokens (1.6GB)，200GB/s 聚合带宽；CMR 达 16.0%，ρ → 1</a:t>
+            </a:r>
+          </a:p>
+        </p:txBody>
+      </p:sp>
+      <p:pic>
+        <p:nvPicPr>
+          <p:cNvPr id="7" name="Picture 6" descr="formula_slide6_regime1.png"/>
+          <p:cNvPicPr>
+            <a:picLocks noChangeAspect="1"/>
+          </p:cNvPicPr>
+          <p:nvPr/>
+        </p:nvPicPr>
+        <p:blipFill>
+          <a:blip r:embed="rId2"/>
+          <a:stretch>
+            <a:fillRect/>
+          </a:stretch>
+        </p:blipFill>
+        <p:spPr>
+          <a:xfrm>
+            <a:off x="676656" y="1490472"/>
+            <a:ext cx="5641848" cy="603504"/>
+          </a:xfrm>
+          <a:prstGeom prst="rect">
+            <a:avLst/>
+          </a:prstGeom>
+        </p:spPr>
+      </p:pic>
+      <p:sp>
+        <p:nvSpPr>
+          <p:cNvPr id="8" name="TextBox 7"/>
+          <p:cNvSpPr txBox="1"/>
+          <p:nvPr/>
+        </p:nvSpPr>
+        <p:spPr>
+          <a:xfrm>
+            <a:off x="676656" y="2121408"/>
+            <a:ext cx="5641848" cy="1435608"/>
+          </a:xfrm>
+          <a:prstGeom prst="rect">
+            <a:avLst/>
+          </a:prstGeom>
+          <a:noFill/>
+        </p:spPr>
+        <p:txBody>
+          <a:bodyPr wrap="square" lIns="0" rIns="0" tIns="0" bIns="0">
+            <a:spAutoFit/>
+          </a:bodyPr>
+          <a:lstStyle/>
           <a:p>
             <a:pPr>
               <a:lnSpc>
-                <a:spcPct val="118000"/>
+                <a:spcPct val="110000"/>
+              </a:lnSpc>
+            </a:pPr>
+            <a:r>
+              <a:rPr sz="800" b="1">
+                <a:solidFill>
+                  <a:srgbClr val="122A49"/>
+                </a:solidFill>
+                <a:latin typeface="Microsoft YaHei"/>
+              </a:rPr>
+              <a:t>• 公式变量与基线场景一： </a:t>
+            </a:r>
+            <a:r>
+              <a:rPr sz="760">
+                <a:solidFill>
+                  <a:srgbClr val="1A2533"/>
+                </a:solidFill>
+                <a:latin typeface="Microsoft YaHei"/>
+              </a:rPr>
+              <a:t>变量定义：C 为并发数，M 为 Master 线程数，t_proc≈0.15ms，β 为互斥锁因子，γ 为无锁总线因子 (γ ≪ β ≈ 0)。【实测场景一】：32K 输入 / 16KB 元数据，RDMA 基线耗时 τ_0=1.00ms，UBMEM 共享内存直达降至 τ_ub=0.70ms (时延降低 30.0%)。</a:t>
+            </a:r>
+          </a:p>
+          <a:p>
+            <a:pPr>
+              <a:lnSpc>
+                <a:spcPct val="110000"/>
               </a:lnSpc>
               <a:spcBef>
-                <a:spcPts val="360"/>
+                <a:spcPts val="150"/>
               </a:spcBef>
             </a:pPr>
             <a:r>
-              <a:rPr sz="850" b="1">
+              <a:rPr sz="800" b="1">
                 <a:solidFill>
                   <a:srgbClr val="122A49"/>
                 </a:solidFill>
                 <a:latin typeface="Microsoft YaHei"/>
               </a:rPr>
-              <a:t>① 物理瓶颈根因： </a:t>
-            </a:r>
-            <a:r>
-              <a:rPr sz="819">
+              <a:t>• 基线 TTFT 6.25ms 来源与 5.95ms 推导： </a:t>
+            </a:r>
+            <a:r>
+              <a:rPr sz="760">
                 <a:solidFill>
                   <a:srgbClr val="1A2533"/>
                 </a:solidFill>
                 <a:latin typeface="Microsoft YaHei"/>
               </a:rPr>
-              <a:t>Mooncake 依赖集中式 Master 进行跨节点 RPC 寻址。SIGMOD '26 Beluga 实测：细粒度 (16-token) 下集中 RPC 与小 I/O 同步开销复合放大，使全命中 TTFT 从 13.0s 崩塌至 76.8s（16KB 读 75% 耗在控制同步）。其并发瓶颈在于 Master 线程池排队与全局锁争用。</a:t>
+              <a:t>【工况定位】：32K 上下文 (1.6GB KVCache)，200GB/s 聚合拉取带宽传输耗时 T_trans=8.0ms；经因果流水重叠掩盖与首字调度执行，数据面净暴露耗时 T_data=5.25ms；叠加开源 RDMA 元数据基线 τ_0=1.00ms，导出基线 TTFT_base = 5.25 + 1.00 = 6.25ms (CMR 达 16.0% 高敏感区)；UBMEM 直读后降为 TTFT_opt = 5.95ms (净提速 0.30ms)。</a:t>
             </a:r>
           </a:p>
           <a:p>
             <a:pPr>
               <a:lnSpc>
-                <a:spcPct val="118000"/>
+                <a:spcPct val="110000"/>
               </a:lnSpc>
               <a:spcBef>
-                <a:spcPts val="360"/>
+                <a:spcPts val="150"/>
               </a:spcBef>
             </a:pPr>
             <a:r>
-              <a:rPr sz="850" b="1">
+              <a:rPr sz="800" b="1">
                 <a:solidFill>
                   <a:srgbClr val="122A49"/>
                 </a:solidFill>
                 <a:latin typeface="Microsoft YaHei"/>
               </a:rPr>
-              <a:t>② 性能衰减量化建模： </a:t>
-            </a:r>
-            <a:r>
-              <a:rPr sz="819">
+              <a:t>• 基线 P99 52.3ms 来源与排队压制： </a:t>
+            </a:r>
+            <a:r>
+              <a:rPr sz="760">
                 <a:solidFill>
                   <a:srgbClr val="1A2533"/>
                 </a:solidFill>
                 <a:latin typeface="Microsoft YaHei"/>
               </a:rPr>
-              <a:t>并发请求数 C 下集中控制耗时 T_ctrl(C) = t_base + [(C-1)/M]·t_proc + β·(C-1)，由队列排队与锁争用驱动，随 C 线性恶化；而原厂基于 UBMEM 总线直通与 RCU 无锁前缀树，去中心化直读且读读零争用，耗时仅 T_ub(C) = t_ub + γ·(C-1)，基本与并发解耦。</a:t>
-            </a:r>
-          </a:p>
-          <a:p>
-            <a:pPr>
-              <a:lnSpc>
-                <a:spcPct val="118000"/>
-              </a:lnSpc>
-              <a:spcBef>
-                <a:spcPts val="360"/>
-              </a:spcBef>
-            </a:pPr>
-            <a:r>
-              <a:rPr sz="850" b="1">
-                <a:solidFill>
-                  <a:srgbClr val="122A49"/>
-                </a:solidFill>
-                <a:latin typeface="Microsoft YaHei"/>
-              </a:rPr>
-              <a:t>③ 原厂软硬协同优化机制： </a:t>
-            </a:r>
-            <a:r>
-              <a:rPr sz="819">
-                <a:solidFill>
-                  <a:srgbClr val="1A2533"/>
-                </a:solidFill>
-                <a:latin typeface="Microsoft YaHei"/>
-              </a:rPr>
-              <a:t>统一总线内存直通 (UBMEM) 共享协议 + 并发无锁前缀匹配树，将跨节点 RPC 寻址重构为硬件级共享内存直读与原子指针访问，彻底消除集中队列与网络协议栈开销。</a:t>
-            </a:r>
-          </a:p>
-          <a:p>
-            <a:pPr>
-              <a:lnSpc>
-                <a:spcPct val="118000"/>
-              </a:lnSpc>
-              <a:spcBef>
-                <a:spcPts val="380"/>
-              </a:spcBef>
-            </a:pPr>
-            <a:r>
-              <a:rPr sz="850" b="1">
-                <a:solidFill>
-                  <a:srgbClr val="2D63B8"/>
-                </a:solidFill>
-                <a:latin typeface="Microsoft YaHei"/>
-              </a:rPr>
-              <a:t>④ 典型模型 (Llama-3-70B, TP=8) 并发算例： </a:t>
-            </a:r>
-            <a:r>
-              <a:rPr sz="819">
-                <a:solidFill>
-                  <a:srgbClr val="1A2533"/>
-                </a:solidFill>
-                <a:latin typeface="Microsoft YaHei"/>
-              </a:rPr>
-              <a:t>8K 前缀，单请求基线 8ms，Master 线程 M=2 (单核 1.6ms)，锁争用 β=0.5ms，正文与计算 220ms。</a:t>
-            </a:r>
-          </a:p>
-          <a:p>
-            <a:pPr>
-              <a:lnSpc>
-                <a:spcPct val="118000"/>
-              </a:lnSpc>
-              <a:spcBef>
-                <a:spcPts val="200"/>
-              </a:spcBef>
-            </a:pPr>
-            <a:r>
-              <a:rPr sz="819" b="1">
-                <a:solidFill>
-                  <a:srgbClr val="1A2533"/>
-                </a:solidFill>
-                <a:latin typeface="Microsoft YaHei"/>
-              </a:rPr>
-              <a:t>• Mooncake 集中 RPC (C=32)： </a:t>
-            </a:r>
-            <a:r>
-              <a:rPr sz="810">
-                <a:solidFill>
-                  <a:srgbClr val="1A2533"/>
-                </a:solidFill>
-                <a:latin typeface="Microsoft YaHei"/>
-              </a:rPr>
-              <a:t>排队 [(31/2)×1.6=24.8ms] + 锁争用 [31×0.5=15.5ms] + 基线 8ms = 48.3ms (TTFT 达 268.3ms)；</a:t>
-            </a:r>
-          </a:p>
-          <a:p>
-            <a:pPr>
-              <a:lnSpc>
-                <a:spcPct val="118000"/>
-              </a:lnSpc>
-              <a:spcBef>
-                <a:spcPts val="200"/>
-              </a:spcBef>
-            </a:pPr>
-            <a:r>
-              <a:rPr sz="819" b="1">
-                <a:solidFill>
-                  <a:srgbClr val="1A2533"/>
-                </a:solidFill>
-                <a:latin typeface="Microsoft YaHei"/>
-              </a:rPr>
-              <a:t>• 原厂 UB 共享内存 (C=32)： </a:t>
-            </a:r>
-            <a:r>
-              <a:rPr sz="810">
-                <a:solidFill>
-                  <a:srgbClr val="1A2533"/>
-                </a:solidFill>
-                <a:latin typeface="Microsoft YaHei"/>
-              </a:rPr>
-              <a:t>去中心化无排队 + RCU 无锁争用，仅总线微延 1.4ms + 基线 4.8ms = 6.2ms (TTFT 为 226.2ms)；</a:t>
-            </a:r>
-          </a:p>
-          <a:p>
-            <a:pPr>
-              <a:lnSpc>
-                <a:spcPct val="118000"/>
-              </a:lnSpc>
-              <a:spcBef>
-                <a:spcPts val="200"/>
-              </a:spcBef>
-            </a:pPr>
-            <a:r>
-              <a:rPr sz="819" b="1">
-                <a:solidFill>
-                  <a:srgbClr val="1A2533"/>
-                </a:solidFill>
-                <a:latin typeface="Microsoft YaHei"/>
-              </a:rPr>
-              <a:t>• 并发消除收益闭环： </a:t>
-            </a:r>
-            <a:r>
-              <a:rPr sz="810">
-                <a:solidFill>
-                  <a:srgbClr val="1A2533"/>
-                </a:solidFill>
-                <a:latin typeface="Microsoft YaHei"/>
-              </a:rPr>
-              <a:t>控制耗时骤降 87.2% (净省 42.1ms)，端到端 TTFT 缩短 15.7%，并发维度严密闭环 Slide 5 检索提升 &gt;30% 成果。</a:t>
+              <a:t>【基线系统】：开源单 Master 上限 μ_base=1000 req/s (平均 1.0ms)。到达率 λ=900 req/s 高载下 (利用率 ρ=90%)，M/M/1 导出 99% 排队等待 W_99 = ln(100)/(μ-λ) = 4.605/100 = 46.05ms，叠加基础耗时 6.25ms 导出基线 P99 为 52.3ms。UBMEM 无锁直达将容量提升至 μ=1429 req/s (余裕扩 5.3 倍)，排队等待骤降至 8.71ms，P99 降至 14.7ms (净降 37.6ms，降幅达 71.9%)。</a:t>
             </a:r>
           </a:p>
         </p:txBody>
@@ -15954,8 +15804,8 @@
         </p:nvSpPr>
         <p:spPr>
           <a:xfrm>
-            <a:off x="4297679" y="2121408"/>
-            <a:ext cx="3593592" cy="4114800"/>
+            <a:off x="548640" y="3675888"/>
+            <a:ext cx="5897880" cy="2505456"/>
           </a:xfrm>
           <a:prstGeom prst="roundRect">
             <a:avLst>
@@ -15999,8 +15849,8 @@
         </p:nvSpPr>
         <p:spPr>
           <a:xfrm>
-            <a:off x="4425695" y="2231136"/>
-            <a:ext cx="3337560" cy="3895344"/>
+            <a:off x="676656" y="3749040"/>
+            <a:ext cx="5641848" cy="384048"/>
           </a:xfrm>
           <a:prstGeom prst="rect">
             <a:avLst/>
@@ -16022,189 +15872,234 @@
               </a:defRPr>
             </a:pPr>
             <a:r>
-              <a:t>打样二：PVT-04 选路防反噬（平抑 TTFT 抖动）</a:t>
-            </a:r>
-          </a:p>
+              <a:t>【价值区域二】高利用率 + 低 CMR（常规长文本 / 聚合带宽下控制面瓶颈转移）</a:t>
+            </a:r>
+          </a:p>
+          <a:p>
+            <a:pPr>
+              <a:spcBef>
+                <a:spcPts val="150"/>
+              </a:spcBef>
+              <a:defRPr sz="850" b="1">
+                <a:solidFill>
+                  <a:srgbClr val="2D63B8"/>
+                </a:solidFill>
+                <a:latin typeface="Microsoft YaHei"/>
+              </a:defRPr>
+            </a:pPr>
+            <a:r>
+              <a:t>典型场景：长文本未命中 Prefill（TTFT 约 100ms），CMR 仅约 1.0%，ρ → 1</a:t>
+            </a:r>
+          </a:p>
+        </p:txBody>
+      </p:sp>
+      <p:pic>
+        <p:nvPicPr>
+          <p:cNvPr id="11" name="Picture 10" descr="formula_slide6_regime2.png"/>
+          <p:cNvPicPr>
+            <a:picLocks noChangeAspect="1"/>
+          </p:cNvPicPr>
+          <p:nvPr/>
+        </p:nvPicPr>
+        <p:blipFill>
+          <a:blip r:embed="rId3"/>
+          <a:stretch>
+            <a:fillRect/>
+          </a:stretch>
+        </p:blipFill>
+        <p:spPr>
+          <a:xfrm>
+            <a:off x="676656" y="4114800"/>
+            <a:ext cx="5641848" cy="603504"/>
+          </a:xfrm>
+          <a:prstGeom prst="rect">
+            <a:avLst/>
+          </a:prstGeom>
+        </p:spPr>
+      </p:pic>
+      <p:sp>
+        <p:nvSpPr>
+          <p:cNvPr id="12" name="TextBox 11"/>
+          <p:cNvSpPr txBox="1"/>
+          <p:nvPr/>
+        </p:nvSpPr>
+        <p:spPr>
+          <a:xfrm>
+            <a:off x="676656" y="4745736"/>
+            <a:ext cx="5641848" cy="1399032"/>
+          </a:xfrm>
+          <a:prstGeom prst="rect">
+            <a:avLst/>
+          </a:prstGeom>
+          <a:noFill/>
+        </p:spPr>
+        <p:txBody>
+          <a:bodyPr wrap="square" lIns="0" rIns="0" tIns="0" bIns="0">
+            <a:spAutoFit/>
+          </a:bodyPr>
+          <a:lstStyle/>
           <a:p>
             <a:pPr>
               <a:lnSpc>
-                <a:spcPct val="118000"/>
+                <a:spcPct val="110000"/>
+              </a:lnSpc>
+            </a:pPr>
+            <a:r>
+              <a:rPr sz="800" b="1">
+                <a:solidFill>
+                  <a:srgbClr val="122A49"/>
+                </a:solidFill>
+                <a:latin typeface="Microsoft YaHei"/>
+              </a:rPr>
+              <a:t>• 聚合带宽与控制面瓶颈转移： </a:t>
+            </a:r>
+            <a:r>
+              <a:rPr sz="760">
+                <a:solidFill>
+                  <a:srgbClr val="1A2533"/>
+                </a:solidFill>
+                <a:latin typeface="Microsoft YaHei"/>
+              </a:rPr>
+              <a:t>【实测场景二联动】：在 200GB/s 聚合带宽与 2MB 大块切片下，数据面搬运瓶颈彻底消除 (T_data 骤降)；未命中重算 GEMM 耗时 T_data≈99.0ms。单次查表 τ_0=1.00ms 仅占 CMR=1.0% (低 CMR 区域)。数据面瓶颈解除后，控制面服务吞吐容量 μ = 1/τ_meta 成为集群 QPS 扩展的绝对一阶天花板。</a:t>
+            </a:r>
+          </a:p>
+          <a:p>
+            <a:pPr>
+              <a:lnSpc>
+                <a:spcPct val="110000"/>
               </a:lnSpc>
               <a:spcBef>
-                <a:spcPts val="360"/>
+                <a:spcPts val="150"/>
               </a:spcBef>
             </a:pPr>
             <a:r>
-              <a:rPr sz="850" b="1">
+              <a:rPr sz="800" b="1">
                 <a:solidFill>
                   <a:srgbClr val="122A49"/>
                 </a:solidFill>
                 <a:latin typeface="Microsoft YaHei"/>
               </a:rPr>
-              <a:t>① 物理瓶颈根因： </a:t>
-            </a:r>
-            <a:r>
-              <a:rPr sz="819">
+              <a:t>• 控制面容量跃升与饱和断崖右移： </a:t>
+            </a:r>
+            <a:r>
+              <a:rPr sz="760">
                 <a:solidFill>
                   <a:srgbClr val="1A2533"/>
                 </a:solidFill>
                 <a:latin typeface="Microsoft YaHei"/>
               </a:rPr>
-              <a:t>对应 Bidaw (FAST '26)、SYMPHONY (NSDI '26) 与 KVServe (SIGCOMM '26) 揭示的队头阻塞与时延反噬难题：两级存储无感知导致 SSD 慢读阻塞 GPU，盲目拉取耗时反超本地重算耗时。</a:t>
+              <a:t>低载下单次缩短 0.3ms 对 100ms TTFT 仅微改 0.3% (易被网络抖动淹没)。但在高利用率 (ρ → 1) 下，元数据时延由 τ_0=1.00ms 降至 τ_ub=0.70ms (降幅 30%)，单 Master 服务容量从 μ_base=1000 req/s 跃升至 μ_opt=1429 req/s (容量跃升 +42.9%)，将服务饱和排队断崖显著右移。</a:t>
             </a:r>
           </a:p>
           <a:p>
             <a:pPr>
               <a:lnSpc>
-                <a:spcPct val="118000"/>
+                <a:spcPct val="110000"/>
               </a:lnSpc>
               <a:spcBef>
-                <a:spcPts val="360"/>
+                <a:spcPts val="150"/>
               </a:spcBef>
             </a:pPr>
             <a:r>
-              <a:rPr sz="850" b="1">
+              <a:rPr sz="800" b="1">
                 <a:solidFill>
                   <a:srgbClr val="122A49"/>
                 </a:solidFill>
                 <a:latin typeface="Microsoft YaHei"/>
               </a:rPr>
-              <a:t>② 性能衰减量化建模： </a:t>
-            </a:r>
-            <a:r>
-              <a:rPr sz="819">
+              <a:t>• 严苛 SLO 准入极限与防雪崩增益： </a:t>
+            </a:r>
+            <a:r>
+              <a:rPr sz="760">
                 <a:solidFill>
                   <a:srgbClr val="1A2533"/>
                 </a:solidFill>
                 <a:latin typeface="Microsoft YaHei"/>
               </a:rPr>
-              <a:t>加载耗时 T_load = t0 + P·k / B；重算耗时 T_recomp = P / r；盈亏平衡点 P_min = t0 / (1/r - k/B)；保守准入 (1+εL)T_load &lt; (1-εR)T_recomp。</a:t>
-            </a:r>
-          </a:p>
-          <a:p>
-            <a:pPr>
-              <a:lnSpc>
-                <a:spcPct val="118000"/>
-              </a:lnSpc>
-              <a:spcBef>
-                <a:spcPts val="360"/>
-              </a:spcBef>
-            </a:pPr>
-            <a:r>
-              <a:rPr sz="850" b="1">
-                <a:solidFill>
-                  <a:srgbClr val="122A49"/>
-                </a:solidFill>
-                <a:latin typeface="Microsoft YaHei"/>
-              </a:rPr>
-              <a:t>③ 原厂软硬协同优化机制： </a:t>
-            </a:r>
-            <a:r>
-              <a:rPr sz="819">
-                <a:solidFill>
-                  <a:srgbClr val="1A2533"/>
-                </a:solidFill>
-                <a:latin typeface="Microsoft YaHei"/>
-              </a:rPr>
-              <a:t>QueryPlan 实时遥测网络有效带宽 B 与 NPU 重算吞吐 r，微秒级比对成本，若 B &lt; k·r 或 P &lt; P_min 则主动决策回退本地重算。</a:t>
-            </a:r>
-          </a:p>
-          <a:p>
-            <a:pPr>
-              <a:lnSpc>
-                <a:spcPct val="118000"/>
-              </a:lnSpc>
-              <a:spcBef>
-                <a:spcPts val="380"/>
-              </a:spcBef>
-            </a:pPr>
-            <a:r>
-              <a:rPr sz="850" b="1">
-                <a:solidFill>
-                  <a:srgbClr val="2D63B8"/>
-                </a:solidFill>
-                <a:latin typeface="Microsoft YaHei"/>
-              </a:rPr>
-              <a:t>④ 典型模型 (Llama-3-70B, TP=8) 算例： </a:t>
-            </a:r>
-            <a:r>
-              <a:rPr sz="819">
-                <a:solidFill>
-                  <a:srgbClr val="1A2533"/>
-                </a:solidFill>
-                <a:latin typeface="Microsoft YaHei"/>
-              </a:rPr>
-              <a:t>单卡重算吞吐 r=40K tokens/s，单卡 k=40KB/token，临界带宽 k·r=1.6GB/s。</a:t>
-            </a:r>
-          </a:p>
-          <a:p>
-            <a:pPr>
-              <a:lnSpc>
-                <a:spcPct val="118000"/>
-              </a:lnSpc>
-              <a:spcBef>
-                <a:spcPts val="200"/>
-              </a:spcBef>
-            </a:pPr>
-            <a:r>
-              <a:rPr sz="819" b="1">
-                <a:solidFill>
-                  <a:srgbClr val="1A2533"/>
-                </a:solidFill>
-                <a:latin typeface="Microsoft YaHei"/>
-              </a:rPr>
-              <a:t>• 正常网络 (B=20GB/s)： </a:t>
-            </a:r>
-            <a:r>
-              <a:rPr sz="810">
-                <a:solidFill>
-                  <a:srgbClr val="1A2533"/>
-                </a:solidFill>
-                <a:latin typeface="Microsoft YaHei"/>
-              </a:rPr>
-              <a:t>盈亏平衡点 P_min ≈ 22 tokens，8K 前缀加载耗时 16.5ms，较本地重算 200ms 净提速 183.5ms；</a:t>
-            </a:r>
-          </a:p>
-          <a:p>
-            <a:pPr>
-              <a:lnSpc>
-                <a:spcPct val="118000"/>
-              </a:lnSpc>
-              <a:spcBef>
-                <a:spcPts val="200"/>
-              </a:spcBef>
-            </a:pPr>
-            <a:r>
-              <a:rPr sz="819" b="1">
-                <a:solidFill>
-                  <a:srgbClr val="1A2533"/>
-                </a:solidFill>
-                <a:latin typeface="Microsoft YaHei"/>
-              </a:rPr>
-              <a:t>• 突发拥塞 (B ≤ 1.6GB/s)： </a:t>
-            </a:r>
-            <a:r>
-              <a:rPr sz="810">
-                <a:solidFill>
-                  <a:srgbClr val="1A2533"/>
-                </a:solidFill>
-                <a:latin typeface="Microsoft YaHei"/>
-              </a:rPr>
-              <a:t>加载耗时骤增至 &gt;200ms，系统微秒拦截回退重算，锁定 200ms 完成，消除时延回退反噬，平抑抖动。</a:t>
+              <a:t>由准入模型 λ_SLO^max = μ - ln(100)/(P99_SLO - T_data)，在 P99 ≤ 120ms 严苛约束下，有效承载 QPS 从 781 提升至 1210 req/s (+54.9%)；在 QPS=960 准饱和洪峰下，基线排队发散导致 P99 飙升至 215.1ms (违背 SLO)，优化后稳定在 109.5ms (P99 降低 49.1%)，彻底规避排队雪崩。</a:t>
             </a:r>
           </a:p>
         </p:txBody>
       </p:sp>
       <p:sp>
         <p:nvSpPr>
-          <p:cNvPr id="11" name="Rounded Rectangle 10"/>
+          <p:cNvPr id="13" name="Rounded Rectangle 12"/>
           <p:cNvSpPr/>
           <p:nvPr/>
         </p:nvSpPr>
         <p:spPr>
           <a:xfrm>
-            <a:off x="8046719" y="2121408"/>
-            <a:ext cx="3593592" cy="4114800"/>
+            <a:off x="6702552" y="1051560"/>
+            <a:ext cx="4937760" cy="2542032"/>
+          </a:xfrm>
+          <a:prstGeom prst="roundRect">
+            <a:avLst>
+              <a:gd name="adj" fmla="val 2000"/>
+            </a:avLst>
+          </a:prstGeom>
+          <a:solidFill>
+            <a:srgbClr val="FFFFFF"/>
+          </a:solidFill>
+          <a:ln>
+            <a:noFill/>
+          </a:ln>
+        </p:spPr>
+        <p:style>
+          <a:lnRef idx="1">
+            <a:schemeClr val="accent1"/>
+          </a:lnRef>
+          <a:fillRef idx="3">
+            <a:schemeClr val="accent1"/>
+          </a:fillRef>
+          <a:effectRef idx="2">
+            <a:schemeClr val="accent1"/>
+          </a:effectRef>
+          <a:fontRef idx="minor">
+            <a:schemeClr val="lt1"/>
+          </a:fontRef>
+        </p:style>
+        <p:txBody>
+          <a:bodyPr rtlCol="0" anchor="ctr"/>
+          <a:lstStyle/>
+          <a:p>
+            <a:pPr algn="ctr"/>
+          </a:p>
+        </p:txBody>
+      </p:sp>
+      <p:pic>
+        <p:nvPicPr>
+          <p:cNvPr id="14" name="Picture 13" descr="chart_metadata_theory.png"/>
+          <p:cNvPicPr>
+            <a:picLocks noChangeAspect="1"/>
+          </p:cNvPicPr>
+          <p:nvPr/>
+        </p:nvPicPr>
+        <p:blipFill>
+          <a:blip r:embed="rId4"/>
+          <a:stretch>
+            <a:fillRect/>
+          </a:stretch>
+        </p:blipFill>
+        <p:spPr>
+          <a:xfrm>
+            <a:off x="6757416" y="1106424"/>
+            <a:ext cx="4828032" cy="2432304"/>
+          </a:xfrm>
+          <a:prstGeom prst="rect">
+            <a:avLst/>
+          </a:prstGeom>
+        </p:spPr>
+      </p:pic>
+      <p:sp>
+        <p:nvSpPr>
+          <p:cNvPr id="15" name="Rounded Rectangle 14"/>
+          <p:cNvSpPr/>
+          <p:nvPr/>
+        </p:nvSpPr>
+        <p:spPr>
+          <a:xfrm>
+            <a:off x="6702552" y="3675888"/>
+            <a:ext cx="4937760" cy="2505456"/>
           </a:xfrm>
           <a:prstGeom prst="roundRect">
             <a:avLst>
@@ -16242,14 +16137,14 @@
       </p:sp>
       <p:sp>
         <p:nvSpPr>
-          <p:cNvPr id="12" name="TextBox 11"/>
+          <p:cNvPr id="16" name="TextBox 15"/>
           <p:cNvSpPr txBox="1"/>
           <p:nvPr/>
         </p:nvSpPr>
         <p:spPr>
           <a:xfrm>
-            <a:off x="8174735" y="2231136"/>
-            <a:ext cx="3337560" cy="3895344"/>
+            <a:off x="6830568" y="3749040"/>
+            <a:ext cx="4681728" cy="2359152"/>
           </a:xfrm>
           <a:prstGeom prst="rect">
             <a:avLst/>
@@ -16271,210 +16166,114 @@
               </a:defRPr>
             </a:pPr>
             <a:r>
-              <a:t>打样三：PVT-07/08 隔离与中继（压制 TPOT 抖动）</a:t>
+              <a:t>【外部数据副证】NVIDIA 顶级工业系统实测客观对齐</a:t>
+            </a:r>
+          </a:p>
+          <a:p>
+            <a:pPr>
+              <a:spcBef>
+                <a:spcPts val="150"/>
+              </a:spcBef>
+              <a:defRPr sz="850" b="1">
+                <a:solidFill>
+                  <a:srgbClr val="A01414"/>
+                </a:solidFill>
+                <a:latin typeface="Microsoft YaHei"/>
+              </a:defRPr>
+            </a:pPr>
+            <a:r>
+              <a:t>证实元数据绝对不是无足轻重的后台任务，而是高并发/大规模下决定吞吐门限的一阶瓶颈</a:t>
             </a:r>
           </a:p>
           <a:p>
             <a:pPr>
               <a:lnSpc>
-                <a:spcPct val="118000"/>
+                <a:spcPct val="115000"/>
               </a:lnSpc>
               <a:spcBef>
-                <a:spcPts val="360"/>
+                <a:spcPts val="260"/>
               </a:spcBef>
             </a:pPr>
             <a:r>
-              <a:rPr sz="850" b="1">
+              <a:rPr sz="830" b="1">
                 <a:solidFill>
                   <a:srgbClr val="122A49"/>
                 </a:solidFill>
                 <a:latin typeface="Microsoft YaHei"/>
               </a:rPr>
-              <a:t>① 物理瓶颈根因： </a:t>
-            </a:r>
-            <a:r>
-              <a:rPr sz="819">
+              <a:t>• NVIDIA Dynamo Flash Indexer (2026 生产级实测)： </a:t>
+            </a:r>
+            <a:r>
+              <a:rPr sz="800">
                 <a:solidFill>
                   <a:srgbClr val="1A2533"/>
                 </a:solidFill>
                 <a:latin typeface="Microsoft YaHei"/>
               </a:rPr>
-              <a:t>对应 DualPath (SIGCOMM '26, DeepSeek 实测未隔离后台搬运导致前台通信恶化 6.7 倍) 与 AITurbo (FAST '26) 揭示的单源出口打满与 Incast 丢包难题：后台大流量无 QoS 争用显存/网络；多节点并发拉取打满源端网卡。</a:t>
+              <a:t>基于真实 Mooncake 生产 Trace 回放（24 核 Arrow Lake/24 线程）：早期仅 385K ops/s，Dynamo v0.1 为 4M ops/s，而 Flash Indexer 暴增至 170M ops/s (42 倍吞吐跃升)。NVIDIA 强调“Slow queries to indexer means user-facing latency”，前缀查询直接暴露于 TTFT 关键路径，其容量上限决定排队雪崩拐点。</a:t>
             </a:r>
           </a:p>
           <a:p>
             <a:pPr>
               <a:lnSpc>
-                <a:spcPct val="118000"/>
+                <a:spcPct val="115000"/>
               </a:lnSpc>
               <a:spcBef>
-                <a:spcPts val="360"/>
+                <a:spcPts val="260"/>
               </a:spcBef>
             </a:pPr>
             <a:r>
-              <a:rPr sz="850" b="1">
+              <a:rPr sz="830" b="1">
                 <a:solidFill>
                   <a:srgbClr val="122A49"/>
                 </a:solidFill>
                 <a:latin typeface="Microsoft YaHei"/>
               </a:rPr>
-              <a:t>② 性能衰减量化建模： </a:t>
-            </a:r>
-            <a:r>
-              <a:rPr sz="819">
+              <a:t>• NVIDIA Branch-Sharded Indexer &amp; AgentX 并发优化： </a:t>
+            </a:r>
+            <a:r>
+              <a:rPr sz="800">
                 <a:solidFill>
                   <a:srgbClr val="1A2533"/>
                 </a:solidFill>
                 <a:latin typeface="Microsoft YaHei"/>
               </a:rPr>
-              <a:t>显存/总线争用模型 ΔTPOT = α · (BW_offload / BW_total)；中继树源端出口流量削减比 G_egress = 1 - b / N。</a:t>
+              <a:t>在 concurrency=512 极高并发 Agentic 工作负载下，全局基数树锁争用与深层前缀遍历开销主导了前端瓶颈；通过分支分片与热路径精简，实测系统全局吞吐提升 +13.7%，中位数输出吞吐提升 +22.2%。</a:t>
             </a:r>
           </a:p>
           <a:p>
             <a:pPr>
               <a:lnSpc>
-                <a:spcPct val="118000"/>
+                <a:spcPct val="115000"/>
               </a:lnSpc>
               <a:spcBef>
-                <a:spcPts val="360"/>
+                <a:spcPts val="260"/>
               </a:spcBef>
             </a:pPr>
             <a:r>
-              <a:rPr sz="850" b="1">
+              <a:rPr sz="830" b="1">
                 <a:solidFill>
                   <a:srgbClr val="122A49"/>
                 </a:solidFill>
                 <a:latin typeface="Microsoft YaHei"/>
               </a:rPr>
-              <a:t>③ 原厂软硬协同优化机制： </a:t>
-            </a:r>
-            <a:r>
-              <a:rPr sz="819">
+              <a:t>• 对本项目的工程支撑： </a:t>
+            </a:r>
+            <a:r>
+              <a:rPr sz="800">
                 <a:solidFill>
                   <a:srgbClr val="1A2533"/>
                 </a:solidFill>
                 <a:latin typeface="Microsoft YaHei"/>
               </a:rPr>
-              <a:t>RoCE/URMA 硬件 DSCP/CoS 映射至 TC0/TC1 物理双轨队列 + 应用层微秒级自适应退避；构建计算节点二叉树中继转发拓扑 (Staging Fanout)。</a:t>
-            </a:r>
-          </a:p>
-          <a:p>
-            <a:pPr>
-              <a:lnSpc>
-                <a:spcPct val="118000"/>
-              </a:lnSpc>
-              <a:spcBef>
-                <a:spcPts val="380"/>
-              </a:spcBef>
-            </a:pPr>
-            <a:r>
-              <a:rPr sz="850" b="1">
-                <a:solidFill>
-                  <a:srgbClr val="2D63B8"/>
-                </a:solidFill>
-                <a:latin typeface="Microsoft YaHei"/>
-              </a:rPr>
-              <a:t>④ 典型模型 (Llama-3-70B, TP=8) 算例： </a:t>
-            </a:r>
-            <a:r>
-              <a:rPr sz="819">
-                <a:solidFill>
-                  <a:srgbClr val="1A2533"/>
-                </a:solidFill>
-                <a:latin typeface="Microsoft YaHei"/>
-              </a:rPr>
-              <a:t>后台满载 100Gbps 换出 (前台在线 Decode 生成)。</a:t>
-            </a:r>
-          </a:p>
-          <a:p>
-            <a:pPr>
-              <a:lnSpc>
-                <a:spcPct val="118000"/>
-              </a:lnSpc>
-              <a:spcBef>
-                <a:spcPts val="200"/>
-              </a:spcBef>
-            </a:pPr>
-            <a:r>
-              <a:rPr sz="819" b="1">
-                <a:solidFill>
-                  <a:srgbClr val="1A2533"/>
-                </a:solidFill>
-                <a:latin typeface="Microsoft YaHei"/>
-              </a:rPr>
-              <a:t>• 未隔离基线： </a:t>
-            </a:r>
-            <a:r>
-              <a:rPr sz="810">
-                <a:solidFill>
-                  <a:srgbClr val="1A2533"/>
-                </a:solidFill>
-                <a:latin typeface="Microsoft YaHei"/>
-              </a:rPr>
-              <a:t>后台大流量抢占导致前台 Decode 单字生成 TPOT 由 18.2ms 恶化至 21.3ms（干扰率达 17.0%）；</a:t>
-            </a:r>
-          </a:p>
-          <a:p>
-            <a:pPr>
-              <a:lnSpc>
-                <a:spcPct val="118000"/>
-              </a:lnSpc>
-              <a:spcBef>
-                <a:spcPts val="200"/>
-              </a:spcBef>
-            </a:pPr>
-            <a:r>
-              <a:rPr sz="819" b="1">
-                <a:solidFill>
-                  <a:srgbClr val="1A2533"/>
-                </a:solidFill>
-                <a:latin typeface="Microsoft YaHei"/>
-              </a:rPr>
-              <a:t>• 原厂 QoS 隔离： </a:t>
-            </a:r>
-            <a:r>
-              <a:rPr sz="810">
-                <a:solidFill>
-                  <a:srgbClr val="1A2533"/>
-                </a:solidFill>
-                <a:latin typeface="Microsoft YaHei"/>
-              </a:rPr>
-              <a:t>硬件优先级严格分流，前台在线推理 TPOT 稳定在 18.4ms，干扰率仅 1.1%（优于 3% 工业红线）；</a:t>
-            </a:r>
-          </a:p>
-          <a:p>
-            <a:pPr>
-              <a:lnSpc>
-                <a:spcPct val="118000"/>
-              </a:lnSpc>
-              <a:spcBef>
-                <a:spcPts val="200"/>
-              </a:spcBef>
-            </a:pPr>
-            <a:r>
-              <a:rPr sz="819" b="1">
-                <a:solidFill>
-                  <a:srgbClr val="1A2533"/>
-                </a:solidFill>
-                <a:latin typeface="Microsoft YaHei"/>
-              </a:rPr>
-              <a:t>• 8 节点广播 (N=8, b=2)： </a:t>
-            </a:r>
-            <a:r>
-              <a:rPr sz="810">
-                <a:solidFill>
-                  <a:srgbClr val="1A2533"/>
-                </a:solidFill>
-                <a:latin typeface="Microsoft YaHei"/>
-              </a:rPr>
-              <a:t>源端网卡正文出口流量从 2.56GB 降至 640MB（节省 75%），消除 Incast 丢包，P99 尾延迟收敛超 50%。</a:t>
+              <a:t>证明微秒级的单次控制面优化，在并发与共享规模放大下，直接转化为 40%+ 的服务容量跃升与 P99 抖动平抑，具备重大工业系统价值。</a:t>
             </a:r>
           </a:p>
         </p:txBody>
       </p:sp>
       <p:sp>
         <p:nvSpPr>
-          <p:cNvPr id="13" name="Rectangle 12"/>
+          <p:cNvPr id="17" name="Rectangle 16"/>
           <p:cNvSpPr/>
           <p:nvPr/>
         </p:nvSpPr>
@@ -16520,7 +16319,7 @@
               </a:defRPr>
             </a:pPr>
             <a:r>
-              <a:t>核心结论：四步逻辑链严密推导给出了量纲一致的收益区间；在物理计算卡就绪后，将第一时间完成实测闭环。</a:t>
+              <a:t>核心结论：元数据 30% 优化在低载下为微秒级收益；在高并发共享场景下转化为 +42.9% 吞吐容量并压制 &gt;70% 的 P99 尾部排队抖动。</a:t>
             </a:r>
           </a:p>
         </p:txBody>
@@ -16574,7 +16373,7 @@
               </a:defRPr>
             </a:pPr>
             <a:r>
-              <a:t>受限项理论建模推导量化曲线与灵敏度分析</a:t>
+              <a:t>受限项理论建模打样与仿真量化分析</a:t>
             </a:r>
           </a:p>
         </p:txBody>
@@ -16610,7 +16409,7 @@
               </a:defRPr>
             </a:pPr>
             <a:r>
-              <a:t>以体系结构第一性原理推导典型模型在三大指标上的输入响应曲线（计算卡就绪后第一时间实测闭环）</a:t>
+              <a:t>以计算机体系结构与网络动力学第一性原理严密建模，图文协同支撑受阻项论证（硬件到位后即刻实测闭环）</a:t>
             </a:r>
           </a:p>
         </p:txBody>
@@ -16646,7 +16445,7 @@
               </a:defRPr>
             </a:pPr>
             <a:r>
-              <a:t>07 / 08</a:t>
+              <a:t>07 / 09</a:t>
             </a:r>
           </a:p>
         </p:txBody>
@@ -16660,7 +16459,100 @@
         <p:spPr>
           <a:xfrm>
             <a:off x="548640" y="1051560"/>
-            <a:ext cx="3593592" cy="5166360"/>
+            <a:ext cx="11091672" cy="384048"/>
+          </a:xfrm>
+          <a:prstGeom prst="roundRect">
+            <a:avLst>
+              <a:gd name="adj" fmla="val 2000"/>
+            </a:avLst>
+          </a:prstGeom>
+          <a:solidFill>
+            <a:srgbClr val="FFF0F0"/>
+          </a:solidFill>
+          <a:ln>
+            <a:noFill/>
+          </a:ln>
+        </p:spPr>
+        <p:style>
+          <a:lnRef idx="1">
+            <a:schemeClr val="accent1"/>
+          </a:lnRef>
+          <a:fillRef idx="3">
+            <a:schemeClr val="accent1"/>
+          </a:fillRef>
+          <a:effectRef idx="2">
+            <a:schemeClr val="accent1"/>
+          </a:effectRef>
+          <a:fontRef idx="minor">
+            <a:schemeClr val="lt1"/>
+          </a:fontRef>
+        </p:style>
+        <p:txBody>
+          <a:bodyPr rtlCol="0" anchor="ctr"/>
+          <a:lstStyle/>
+          <a:p>
+            <a:pPr algn="ctr"/>
+          </a:p>
+        </p:txBody>
+      </p:sp>
+      <p:sp>
+        <p:nvSpPr>
+          <p:cNvPr id="6" name="TextBox 5"/>
+          <p:cNvSpPr txBox="1"/>
+          <p:nvPr/>
+        </p:nvSpPr>
+        <p:spPr>
+          <a:xfrm>
+            <a:off x="685800" y="1069848"/>
+            <a:ext cx="10817352" cy="347472"/>
+          </a:xfrm>
+          <a:prstGeom prst="rect">
+            <a:avLst/>
+          </a:prstGeom>
+          <a:noFill/>
+        </p:spPr>
+        <p:txBody>
+          <a:bodyPr wrap="square" lIns="0" rIns="0" tIns="0" bIns="0">
+            <a:spAutoFit/>
+          </a:bodyPr>
+          <a:lstStyle/>
+          <a:p>
+            <a:pPr>
+              <a:lnSpc>
+                <a:spcPct val="115000"/>
+              </a:lnSpc>
+            </a:pPr>
+            <a:r>
+              <a:rPr sz="950" b="1">
+                <a:solidFill>
+                  <a:srgbClr val="A01414"/>
+                </a:solidFill>
+                <a:latin typeface="Microsoft YaHei"/>
+              </a:rPr>
+              <a:t>【硬件实验环境客观差距与建模原由】</a:t>
+            </a:r>
+            <a:r>
+              <a:rPr sz="880">
+                <a:solidFill>
+                  <a:srgbClr val="1A2533"/>
+                </a:solidFill>
+                <a:latin typeface="Microsoft YaHei"/>
+              </a:rPr>
+              <a:t>当前仅具备通用 Host CPU 基础通信环境，缺乏国产高带宽显存 NPU、TP=8 多卡拓扑与硬件 QoS 交换机。在物理硬件就绪前，依据第一性原理对受阻项开展严密建模与仿真打样，为后续接入真实大模型流水确立量化基准。</a:t>
+            </a:r>
+          </a:p>
+        </p:txBody>
+      </p:sp>
+      <p:sp>
+        <p:nvSpPr>
+          <p:cNvPr id="7" name="Rounded Rectangle 6"/>
+          <p:cNvSpPr/>
+          <p:nvPr/>
+        </p:nvSpPr>
+        <p:spPr>
+          <a:xfrm>
+            <a:off x="548640" y="1508760"/>
+            <a:ext cx="5394960" cy="4709160"/>
           </a:xfrm>
           <a:prstGeom prst="roundRect">
             <a:avLst>
@@ -16698,14 +16590,14 @@
       </p:sp>
       <p:sp>
         <p:nvSpPr>
-          <p:cNvPr id="6" name="TextBox 5"/>
+          <p:cNvPr id="8" name="TextBox 7"/>
           <p:cNvSpPr txBox="1"/>
           <p:nvPr/>
         </p:nvSpPr>
         <p:spPr>
           <a:xfrm>
-            <a:off x="658368" y="1124712"/>
-            <a:ext cx="3374136" cy="457200"/>
+            <a:off x="676656" y="1581912"/>
+            <a:ext cx="5138928" cy="402336"/>
           </a:xfrm>
           <a:prstGeom prst="rect">
             <a:avLst/>
@@ -16719,7 +16611,7 @@
           <a:lstStyle/>
           <a:p>
             <a:pPr>
-              <a:defRPr sz="1120" b="1">
+              <a:defRPr sz="1100" b="1">
                 <a:solidFill>
                   <a:srgbClr val="122A49"/>
                 </a:solidFill>
@@ -16727,15 +16619,15 @@
               </a:defRPr>
             </a:pPr>
             <a:r>
-              <a:t>图 1 · UB 技术元数据检索对 TTFT 收益仿真</a:t>
+              <a:t>【打样一】PVT-04 微秒级动态选路防反噬（平抑 TTFT 尾部抖动）</a:t>
             </a:r>
           </a:p>
           <a:p>
             <a:pPr>
               <a:spcBef>
-                <a:spcPts val="150"/>
+                <a:spcPts val="120"/>
               </a:spcBef>
-              <a:defRPr sz="850">
+              <a:defRPr sz="850" b="1">
                 <a:solidFill>
                   <a:srgbClr val="2D63B8"/>
                 </a:solidFill>
@@ -16743,14 +16635,14 @@
               </a:defRPr>
             </a:pPr>
             <a:r>
-              <a:t>并发请求下集中式 RPC 排队 vs 原厂 UB 共享内存检索</a:t>
+              <a:t>针对队头阻塞与时延倒挂难题 · 建立临界可用带宽盈亏平衡点决策模型</a:t>
             </a:r>
           </a:p>
         </p:txBody>
       </p:sp>
       <p:pic>
         <p:nvPicPr>
-          <p:cNvPr id="7" name="Picture 6" descr="chart1_metadata_ttft.png"/>
+          <p:cNvPr id="9" name="Picture 8" descr="chart2_pvt04_dynamic_routing_wide.png"/>
           <p:cNvPicPr>
             <a:picLocks noChangeAspect="1"/>
           </p:cNvPicPr>
@@ -16764,8 +16656,32 @@
         </p:blipFill>
         <p:spPr>
           <a:xfrm>
-            <a:off x="658368" y="1618488"/>
-            <a:ext cx="3374136" cy="2249424"/>
+            <a:off x="658368" y="1965960"/>
+            <a:ext cx="5175504" cy="1572768"/>
+          </a:xfrm>
+          <a:prstGeom prst="rect">
+            <a:avLst/>
+          </a:prstGeom>
+        </p:spPr>
+      </p:pic>
+      <p:pic>
+        <p:nvPicPr>
+          <p:cNvPr id="10" name="Picture 9" descr="formula_slide7_pvt04.png"/>
+          <p:cNvPicPr>
+            <a:picLocks noChangeAspect="1"/>
+          </p:cNvPicPr>
+          <p:nvPr/>
+        </p:nvPicPr>
+        <p:blipFill>
+          <a:blip r:embed="rId3"/>
+          <a:stretch>
+            <a:fillRect/>
+          </a:stretch>
+        </p:blipFill>
+        <p:spPr>
+          <a:xfrm>
+            <a:off x="658368" y="3575303"/>
+            <a:ext cx="5175504" cy="676656"/>
           </a:xfrm>
           <a:prstGeom prst="rect">
             <a:avLst/>
@@ -16774,14 +16690,14 @@
       </p:pic>
       <p:sp>
         <p:nvSpPr>
-          <p:cNvPr id="8" name="TextBox 7"/>
+          <p:cNvPr id="11" name="TextBox 10"/>
           <p:cNvSpPr txBox="1"/>
           <p:nvPr/>
         </p:nvSpPr>
         <p:spPr>
           <a:xfrm>
-            <a:off x="658368" y="3922776"/>
-            <a:ext cx="3374136" cy="2194560"/>
+            <a:off x="676656" y="4288536"/>
+            <a:ext cx="5138928" cy="1865376"/>
           </a:xfrm>
           <a:prstGeom prst="rect">
             <a:avLst/>
@@ -16795,113 +16711,97 @@
           <a:lstStyle/>
           <a:p>
             <a:pPr>
-              <a:defRPr sz="880" b="1">
+              <a:lnSpc>
+                <a:spcPct val="115000"/>
+              </a:lnSpc>
+            </a:pPr>
+            <a:r>
+              <a:rPr sz="840" b="1">
                 <a:solidFill>
                   <a:srgbClr val="122A49"/>
                 </a:solidFill>
                 <a:latin typeface="Microsoft YaHei"/>
-              </a:defRPr>
-            </a:pPr>
-            <a:r>
-              <a:t>【自变量输入】在线并发请求数 C (1 ~ 64 并发请求)</a:t>
+              </a:rPr>
+              <a:t>• ① 物理瓶颈根因： </a:t>
+            </a:r>
+            <a:r>
+              <a:rPr sz="810">
+                <a:solidFill>
+                  <a:srgbClr val="1A2533"/>
+                </a:solidFill>
+                <a:latin typeface="Microsoft YaHei"/>
+              </a:rPr>
+              <a:t>Bidaw (FAST '26)、SYMPHONY (NSDI '26) 与 KVServe 证实：传统方案缺乏链路感知，低带宽下盲目拉取极易反超重算耗时，在短文本与突发拥塞下诱发数十至数百毫秒的时延反噬。</a:t>
             </a:r>
           </a:p>
           <a:p>
             <a:pPr>
               <a:lnSpc>
-                <a:spcPct val="116000"/>
+                <a:spcPct val="115000"/>
               </a:lnSpc>
               <a:spcBef>
-                <a:spcPts val="350"/>
+                <a:spcPts val="300"/>
               </a:spcBef>
             </a:pPr>
             <a:r>
-              <a:rPr sz="850" b="1">
+              <a:rPr sz="840" b="1">
+                <a:solidFill>
+                  <a:srgbClr val="122A49"/>
+                </a:solidFill>
+                <a:latin typeface="Microsoft YaHei"/>
+              </a:rPr>
+              <a:t>• ② 原厂选路机制： </a:t>
+            </a:r>
+            <a:r>
+              <a:rPr sz="810">
                 <a:solidFill>
                   <a:srgbClr val="1A2533"/>
                 </a:solidFill>
                 <a:latin typeface="Microsoft YaHei"/>
               </a:rPr>
-              <a:t>• 集中 RPC 并发排队恶化： </a:t>
-            </a:r>
-            <a:r>
-              <a:rPr sz="830">
-                <a:solidFill>
-                  <a:srgbClr val="1A2533"/>
-                </a:solidFill>
-                <a:latin typeface="Microsoft YaHei"/>
-              </a:rPr>
-              <a:t>Mooncake 依赖跨节点 RPC 寻址，并发 32 时排队与锁争用达 40.3ms，前置时延飙升至 48.3ms (Beluga 揭示细粒度控制复合放大可使 TTFT 达 76.8s)。</a:t>
+              <a:t>QueryPlan 实时遥测链路可用带宽 B 与算力 r，微秒级评估成本；若 B &lt; Bcrit 或前缀较短则主动截断拉取并回退本地重算，彻底规避反噬。</a:t>
             </a:r>
           </a:p>
           <a:p>
             <a:pPr>
               <a:lnSpc>
-                <a:spcPct val="116000"/>
+                <a:spcPct val="115000"/>
               </a:lnSpc>
               <a:spcBef>
-                <a:spcPts val="350"/>
+                <a:spcPts val="300"/>
               </a:spcBef>
             </a:pPr>
             <a:r>
-              <a:rPr sz="850" b="1">
+              <a:rPr sz="840" b="1">
+                <a:solidFill>
+                  <a:srgbClr val="122A49"/>
+                </a:solidFill>
+                <a:latin typeface="Microsoft YaHei"/>
+              </a:rPr>
+              <a:t>• ③ Llama-3-70B 算例： </a:t>
+            </a:r>
+            <a:r>
+              <a:rPr sz="810">
                 <a:solidFill>
                   <a:srgbClr val="1A2533"/>
                 </a:solidFill>
                 <a:latin typeface="Microsoft YaHei"/>
               </a:rPr>
-              <a:t>• UB 共享内存直通优势： </a:t>
-            </a:r>
-            <a:r>
-              <a:rPr sz="830">
-                <a:solidFill>
-                  <a:srgbClr val="1A2533"/>
-                </a:solidFill>
-                <a:latin typeface="Microsoft YaHei"/>
-              </a:rPr>
-              <a:t>无集中 RPC 队列且 RCU 无锁并发，并发 32 下前置控制仅 6.2ms (控制开销骤降 87.2%，净省 42.1ms)。</a:t>
-            </a:r>
-          </a:p>
-          <a:p>
-            <a:pPr>
-              <a:lnSpc>
-                <a:spcPct val="116000"/>
-              </a:lnSpc>
-              <a:spcBef>
-                <a:spcPts val="350"/>
-              </a:spcBef>
-            </a:pPr>
-            <a:r>
-              <a:rPr sz="850" b="1">
-                <a:solidFill>
-                  <a:srgbClr val="1A2533"/>
-                </a:solidFill>
-                <a:latin typeface="Microsoft YaHei"/>
-              </a:rPr>
-              <a:t>• 端到端 TTFT 确定性闭环： </a:t>
-            </a:r>
-            <a:r>
-              <a:rPr sz="830">
-                <a:solidFill>
-                  <a:srgbClr val="1A2533"/>
-                </a:solidFill>
-                <a:latin typeface="Microsoft YaHei"/>
-              </a:rPr>
-              <a:t>首字前置等待直接节省 42.1ms (TTFT 缩短 15.7%)，消除并发积压，严密闭环 Slide 5 实测提升 &gt;30% 成果。</a:t>
+              <a:t>单卡 r=40K tokens/s，k=40KB/token：正常网络 (20GB/s) 下 8K 前缀加载仅 16.5ms (净提速 183.5ms)；网络突发拥塞 (B ≤ 1.6GB/s) 时微秒决策回退重算，锁定 200ms 完成，平抑长尾。</a:t>
             </a:r>
           </a:p>
         </p:txBody>
       </p:sp>
       <p:sp>
         <p:nvSpPr>
-          <p:cNvPr id="9" name="Rounded Rectangle 8"/>
+          <p:cNvPr id="12" name="Rounded Rectangle 11"/>
           <p:cNvSpPr/>
           <p:nvPr/>
         </p:nvSpPr>
         <p:spPr>
           <a:xfrm>
-            <a:off x="4297679" y="1051560"/>
-            <a:ext cx="3593592" cy="5166360"/>
+            <a:off x="6245352" y="1508760"/>
+            <a:ext cx="5394960" cy="4709160"/>
           </a:xfrm>
           <a:prstGeom prst="roundRect">
             <a:avLst>
@@ -16939,14 +16839,14 @@
       </p:sp>
       <p:sp>
         <p:nvSpPr>
-          <p:cNvPr id="10" name="TextBox 9"/>
+          <p:cNvPr id="13" name="TextBox 12"/>
           <p:cNvSpPr txBox="1"/>
           <p:nvPr/>
         </p:nvSpPr>
         <p:spPr>
           <a:xfrm>
-            <a:off x="4407407" y="1124712"/>
-            <a:ext cx="3374136" cy="457200"/>
+            <a:off x="6373368" y="1581912"/>
+            <a:ext cx="5138928" cy="402336"/>
           </a:xfrm>
           <a:prstGeom prst="rect">
             <a:avLst/>
@@ -16960,7 +16860,7 @@
           <a:lstStyle/>
           <a:p>
             <a:pPr>
-              <a:defRPr sz="1120" b="1">
+              <a:defRPr sz="1100" b="1">
                 <a:solidFill>
                   <a:srgbClr val="122A49"/>
                 </a:solidFill>
@@ -16968,15 +16868,15 @@
               </a:defRPr>
             </a:pPr>
             <a:r>
-              <a:t>图 2 · PVT-04 动态选路防反噬灵敏度曲线</a:t>
+              <a:t>【打样二】PVT-07/08 硬件 QoS 隔离与树状中继（压制 TPOT 抖动）</a:t>
             </a:r>
           </a:p>
           <a:p>
             <a:pPr>
               <a:spcBef>
-                <a:spcPts val="150"/>
+                <a:spcPts val="120"/>
               </a:spcBef>
-              <a:defRPr sz="850">
+              <a:defRPr sz="850" b="1">
                 <a:solidFill>
                   <a:srgbClr val="2D63B8"/>
                 </a:solidFill>
@@ -16984,255 +16884,14 @@
               </a:defRPr>
             </a:pPr>
             <a:r>
-              <a:t>有效网络带宽变化下静态拉取 vs 动态决策选路</a:t>
+              <a:t>针对后台大搬运带宽争用与单源 Incast · 建立双轨流控与二叉树中继模型</a:t>
             </a:r>
           </a:p>
         </p:txBody>
       </p:sp>
       <p:pic>
         <p:nvPicPr>
-          <p:cNvPr id="11" name="Picture 10" descr="chart2_pvt04_dynamic_routing.png"/>
-          <p:cNvPicPr>
-            <a:picLocks noChangeAspect="1"/>
-          </p:cNvPicPr>
-          <p:nvPr/>
-        </p:nvPicPr>
-        <p:blipFill>
-          <a:blip r:embed="rId3"/>
-          <a:stretch>
-            <a:fillRect/>
-          </a:stretch>
-        </p:blipFill>
-        <p:spPr>
-          <a:xfrm>
-            <a:off x="4407407" y="1618488"/>
-            <a:ext cx="3374136" cy="2249424"/>
-          </a:xfrm>
-          <a:prstGeom prst="rect">
-            <a:avLst/>
-          </a:prstGeom>
-        </p:spPr>
-      </p:pic>
-      <p:sp>
-        <p:nvSpPr>
-          <p:cNvPr id="12" name="TextBox 11"/>
-          <p:cNvSpPr txBox="1"/>
-          <p:nvPr/>
-        </p:nvSpPr>
-        <p:spPr>
-          <a:xfrm>
-            <a:off x="4407407" y="3922776"/>
-            <a:ext cx="3374136" cy="2194560"/>
-          </a:xfrm>
-          <a:prstGeom prst="rect">
-            <a:avLst/>
-          </a:prstGeom>
-          <a:noFill/>
-        </p:spPr>
-        <p:txBody>
-          <a:bodyPr wrap="square" lIns="0" rIns="0" tIns="0" bIns="0">
-            <a:spAutoFit/>
-          </a:bodyPr>
-          <a:lstStyle/>
-          <a:p>
-            <a:pPr>
-              <a:defRPr sz="880" b="1">
-                <a:solidFill>
-                  <a:srgbClr val="122A49"/>
-                </a:solidFill>
-                <a:latin typeface="Microsoft YaHei"/>
-              </a:defRPr>
-            </a:pPr>
-            <a:r>
-              <a:t>【自变量输入】网络有效可用带宽 (0.4 ~ 25 GB/s)</a:t>
-            </a:r>
-          </a:p>
-          <a:p>
-            <a:pPr>
-              <a:lnSpc>
-                <a:spcPct val="116000"/>
-              </a:lnSpc>
-              <a:spcBef>
-                <a:spcPts val="350"/>
-              </a:spcBef>
-            </a:pPr>
-            <a:r>
-              <a:rPr sz="850" b="1">
-                <a:solidFill>
-                  <a:srgbClr val="1A2533"/>
-                </a:solidFill>
-                <a:latin typeface="Microsoft YaHei"/>
-              </a:rPr>
-              <a:t>• 临界平衡点： </a:t>
-            </a:r>
-            <a:r>
-              <a:rPr sz="830">
-                <a:solidFill>
-                  <a:srgbClr val="1A2533"/>
-                </a:solidFill>
-                <a:latin typeface="Microsoft YaHei"/>
-              </a:rPr>
-              <a:t>单卡临界可用带宽 Bcrit = 1.6 GB/s；低于该临界值时，盲目网络拉取耗时将反超本地重算。</a:t>
-            </a:r>
-          </a:p>
-          <a:p>
-            <a:pPr>
-              <a:lnSpc>
-                <a:spcPct val="116000"/>
-              </a:lnSpc>
-              <a:spcBef>
-                <a:spcPts val="350"/>
-              </a:spcBef>
-            </a:pPr>
-            <a:r>
-              <a:rPr sz="850" b="1">
-                <a:solidFill>
-                  <a:srgbClr val="1A2533"/>
-                </a:solidFill>
-                <a:latin typeface="Microsoft YaHei"/>
-              </a:rPr>
-              <a:t>• 正常网络 (20GB/s)： </a:t>
-            </a:r>
-            <a:r>
-              <a:rPr sz="830">
-                <a:solidFill>
-                  <a:srgbClr val="1A2533"/>
-                </a:solidFill>
-                <a:latin typeface="Microsoft YaHei"/>
-              </a:rPr>
-              <a:t>8K 前缀拉取仅 16.5ms，较本地重算 (200ms) 净提速 183.5ms (临界平衡点仅 22 Tokens)。</a:t>
-            </a:r>
-          </a:p>
-          <a:p>
-            <a:pPr>
-              <a:lnSpc>
-                <a:spcPct val="116000"/>
-              </a:lnSpc>
-              <a:spcBef>
-                <a:spcPts val="350"/>
-              </a:spcBef>
-            </a:pPr>
-            <a:r>
-              <a:rPr sz="850" b="1">
-                <a:solidFill>
-                  <a:srgbClr val="1A2533"/>
-                </a:solidFill>
-                <a:latin typeface="Microsoft YaHei"/>
-              </a:rPr>
-              <a:t>• 拥塞主动保护： </a:t>
-            </a:r>
-            <a:r>
-              <a:rPr sz="830">
-                <a:solidFill>
-                  <a:srgbClr val="1A2533"/>
-                </a:solidFill>
-                <a:latin typeface="Microsoft YaHei"/>
-              </a:rPr>
-              <a:t>网络突发拥塞时微秒决策回退本地重算，锁定 200ms 完成，消除时延倒挂反噬。</a:t>
-            </a:r>
-          </a:p>
-        </p:txBody>
-      </p:sp>
-      <p:sp>
-        <p:nvSpPr>
-          <p:cNvPr id="13" name="Rounded Rectangle 12"/>
-          <p:cNvSpPr/>
-          <p:nvPr/>
-        </p:nvSpPr>
-        <p:spPr>
-          <a:xfrm>
-            <a:off x="8046719" y="1051560"/>
-            <a:ext cx="3593592" cy="5166360"/>
-          </a:xfrm>
-          <a:prstGeom prst="roundRect">
-            <a:avLst>
-              <a:gd name="adj" fmla="val 2000"/>
-            </a:avLst>
-          </a:prstGeom>
-          <a:solidFill>
-            <a:srgbClr val="FFF5D9"/>
-          </a:solidFill>
-          <a:ln>
-            <a:noFill/>
-          </a:ln>
-        </p:spPr>
-        <p:style>
-          <a:lnRef idx="1">
-            <a:schemeClr val="accent1"/>
-          </a:lnRef>
-          <a:fillRef idx="3">
-            <a:schemeClr val="accent1"/>
-          </a:fillRef>
-          <a:effectRef idx="2">
-            <a:schemeClr val="accent1"/>
-          </a:effectRef>
-          <a:fontRef idx="minor">
-            <a:schemeClr val="lt1"/>
-          </a:fontRef>
-        </p:style>
-        <p:txBody>
-          <a:bodyPr rtlCol="0" anchor="ctr"/>
-          <a:lstStyle/>
-          <a:p>
-            <a:pPr algn="ctr"/>
-          </a:p>
-        </p:txBody>
-      </p:sp>
-      <p:sp>
-        <p:nvSpPr>
-          <p:cNvPr id="14" name="TextBox 13"/>
-          <p:cNvSpPr txBox="1"/>
-          <p:nvPr/>
-        </p:nvSpPr>
-        <p:spPr>
-          <a:xfrm>
-            <a:off x="8156447" y="1124712"/>
-            <a:ext cx="3374136" cy="457200"/>
-          </a:xfrm>
-          <a:prstGeom prst="rect">
-            <a:avLst/>
-          </a:prstGeom>
-          <a:noFill/>
-        </p:spPr>
-        <p:txBody>
-          <a:bodyPr wrap="square" lIns="0" rIns="0" tIns="0" bIns="0">
-            <a:spAutoFit/>
-          </a:bodyPr>
-          <a:lstStyle/>
-          <a:p>
-            <a:pPr>
-              <a:defRPr sz="1120" b="1">
-                <a:solidFill>
-                  <a:srgbClr val="122A49"/>
-                </a:solidFill>
-                <a:latin typeface="Microsoft YaHei"/>
-              </a:defRPr>
-            </a:pPr>
-            <a:r>
-              <a:t>图 3 · PVT-07/08 QoS 隔离与中继抗干扰表现</a:t>
-            </a:r>
-          </a:p>
-          <a:p>
-            <a:pPr>
-              <a:spcBef>
-                <a:spcPts val="150"/>
-              </a:spcBef>
-              <a:defRPr sz="850">
-                <a:solidFill>
-                  <a:srgbClr val="2D63B8"/>
-                </a:solidFill>
-                <a:latin typeface="Microsoft YaHei"/>
-              </a:defRPr>
-            </a:pPr>
-            <a:r>
-              <a:t>后台换出满载下未隔离 vs 硬件 QoS 隔离 TPOT 曲线</a:t>
-            </a:r>
-          </a:p>
-        </p:txBody>
-      </p:sp>
-      <p:pic>
-        <p:nvPicPr>
-          <p:cNvPr id="15" name="Picture 14" descr="chart3_pvt07_qos_isolation.png"/>
+          <p:cNvPr id="14" name="Picture 13" descr="chart3_pvt07_qos_isolation_wide.png"/>
           <p:cNvPicPr>
             <a:picLocks noChangeAspect="1"/>
           </p:cNvPicPr>
@@ -17246,8 +16905,32 @@
         </p:blipFill>
         <p:spPr>
           <a:xfrm>
-            <a:off x="8156447" y="1618488"/>
-            <a:ext cx="3374136" cy="2249424"/>
+            <a:off x="6355080" y="1965960"/>
+            <a:ext cx="5175504" cy="1572768"/>
+          </a:xfrm>
+          <a:prstGeom prst="rect">
+            <a:avLst/>
+          </a:prstGeom>
+        </p:spPr>
+      </p:pic>
+      <p:pic>
+        <p:nvPicPr>
+          <p:cNvPr id="15" name="Picture 14" descr="formula_slide7_pvt07.png"/>
+          <p:cNvPicPr>
+            <a:picLocks noChangeAspect="1"/>
+          </p:cNvPicPr>
+          <p:nvPr/>
+        </p:nvPicPr>
+        <p:blipFill>
+          <a:blip r:embed="rId5"/>
+          <a:stretch>
+            <a:fillRect/>
+          </a:stretch>
+        </p:blipFill>
+        <p:spPr>
+          <a:xfrm>
+            <a:off x="6355080" y="3575303"/>
+            <a:ext cx="5175504" cy="676656"/>
           </a:xfrm>
           <a:prstGeom prst="rect">
             <a:avLst/>
@@ -17262,8 +16945,8 @@
         </p:nvSpPr>
         <p:spPr>
           <a:xfrm>
-            <a:off x="8156447" y="3922776"/>
-            <a:ext cx="3374136" cy="2194560"/>
+            <a:off x="6373368" y="4288536"/>
+            <a:ext cx="5138928" cy="1865376"/>
           </a:xfrm>
           <a:prstGeom prst="rect">
             <a:avLst/>
@@ -17277,99 +16960,83 @@
           <a:lstStyle/>
           <a:p>
             <a:pPr>
-              <a:defRPr sz="880" b="1">
+              <a:lnSpc>
+                <a:spcPct val="115000"/>
+              </a:lnSpc>
+            </a:pPr>
+            <a:r>
+              <a:rPr sz="840" b="1">
                 <a:solidFill>
                   <a:srgbClr val="122A49"/>
                 </a:solidFill>
                 <a:latin typeface="Microsoft YaHei"/>
-              </a:defRPr>
-            </a:pPr>
-            <a:r>
-              <a:t>【自变量输入】后台换出 I/O 带宽 (0 ~ 100 Gbps)</a:t>
+              </a:rPr>
+              <a:t>• ① 物理瓶颈根因： </a:t>
+            </a:r>
+            <a:r>
+              <a:rPr sz="810">
+                <a:solidFill>
+                  <a:srgbClr val="1A2533"/>
+                </a:solidFill>
+                <a:latin typeface="Microsoft YaHei"/>
+              </a:rPr>
+              <a:t>DualPath (SIGCOMM '26, DeepSeek 实测未隔离搬运导致前台通信恶化 6.7 倍) 与 AITurbo 证实：后台海量换出争用访存/网络，多节点并发拉取打满源端网卡极易触发 Incast 丢包风暴。</a:t>
             </a:r>
           </a:p>
           <a:p>
             <a:pPr>
               <a:lnSpc>
-                <a:spcPct val="116000"/>
+                <a:spcPct val="115000"/>
               </a:lnSpc>
               <a:spcBef>
-                <a:spcPts val="350"/>
+                <a:spcPts val="300"/>
               </a:spcBef>
             </a:pPr>
             <a:r>
-              <a:rPr sz="850" b="1">
+              <a:rPr sz="840" b="1">
+                <a:solidFill>
+                  <a:srgbClr val="122A49"/>
+                </a:solidFill>
+                <a:latin typeface="Microsoft YaHei"/>
+              </a:rPr>
+              <a:t>• ② 原厂隔离机制： </a:t>
+            </a:r>
+            <a:r>
+              <a:rPr sz="810">
                 <a:solidFill>
                   <a:srgbClr val="1A2533"/>
                 </a:solidFill>
                 <a:latin typeface="Microsoft YaHei"/>
               </a:rPr>
-              <a:t>• 未隔离基线： </a:t>
-            </a:r>
-            <a:r>
-              <a:rPr sz="830">
-                <a:solidFill>
-                  <a:srgbClr val="1A2533"/>
-                </a:solidFill>
-                <a:latin typeface="Microsoft YaHei"/>
-              </a:rPr>
-              <a:t>后台大流量争用导致在线 Decode TPOT 从 18.2ms 恶化至 21.3ms（干扰率高达 17.0%）。</a:t>
+              <a:t>RoCE/URMA DSCP/CoS 映射至 TC0/TC1 物理双轨队列 + 应用层微秒自适应退避；构建计算节点二叉树中继转发拓扑 (Staging Fanout) 接力广播。</a:t>
             </a:r>
           </a:p>
           <a:p>
             <a:pPr>
               <a:lnSpc>
-                <a:spcPct val="116000"/>
+                <a:spcPct val="115000"/>
               </a:lnSpc>
               <a:spcBef>
-                <a:spcPts val="350"/>
+                <a:spcPts val="300"/>
               </a:spcBef>
             </a:pPr>
             <a:r>
-              <a:rPr sz="850" b="1">
+              <a:rPr sz="840" b="1">
+                <a:solidFill>
+                  <a:srgbClr val="122A49"/>
+                </a:solidFill>
+                <a:latin typeface="Microsoft YaHei"/>
+              </a:rPr>
+              <a:t>• ③ Llama-3-70B 算例： </a:t>
+            </a:r>
+            <a:r>
+              <a:rPr sz="810">
                 <a:solidFill>
                   <a:srgbClr val="1A2533"/>
                 </a:solidFill>
                 <a:latin typeface="Microsoft YaHei"/>
               </a:rPr>
-              <a:t>• QoS 双轨隔离： </a:t>
-            </a:r>
-            <a:r>
-              <a:rPr sz="830">
-                <a:solidFill>
-                  <a:srgbClr val="1A2533"/>
-                </a:solidFill>
-                <a:latin typeface="Microsoft YaHei"/>
-              </a:rPr>
-              <a:t>TC0/TC1 硬件优先级分流下 TPOT 稳定在 18.4ms，干扰率仅 1.1%（优于 3% 工业红线）。</a:t>
-            </a:r>
-          </a:p>
-          <a:p>
-            <a:pPr>
-              <a:lnSpc>
-                <a:spcPct val="116000"/>
-              </a:lnSpc>
-              <a:spcBef>
-                <a:spcPts val="350"/>
-              </a:spcBef>
-            </a:pPr>
-            <a:r>
-              <a:rPr sz="850" b="1">
-                <a:solidFill>
-                  <a:srgbClr val="1A2533"/>
-                </a:solidFill>
-                <a:latin typeface="Microsoft YaHei"/>
-              </a:rPr>
-              <a:t>• 树状中继分发： </a:t>
-            </a:r>
-            <a:r>
-              <a:rPr sz="830">
-                <a:solidFill>
-                  <a:srgbClr val="1A2533"/>
-                </a:solidFill>
-                <a:latin typeface="Microsoft YaHei"/>
-              </a:rPr>
-              <a:t>PVT-08 树状中继将 8 节点源端网卡流量削减 75%，消除 Incast 丢包，收敛尾部抖动。</a:t>
+              <a:t>100Gbps 混压下未隔离基线前台在线 TPOT 由 18.2ms 恶化至 21.3ms (干扰率 17.0%)；原厂 QoS 使 TPOT 稳定在 18.4ms (干扰率仅 1.1% &lt; 3% 红线)；树状中继使源端出口流量削减 75%，杜绝丢包。</a:t>
             </a:r>
           </a:p>
         </p:txBody>
@@ -17422,7 +17089,7 @@
               </a:defRPr>
             </a:pPr>
             <a:r>
-              <a:t>核心结论：三项理论仿真精确刻画了输入响应曲线与临界转折点，为硬件到位后的实测验证确立了可对照的定量基准。</a:t>
+              <a:t>核心结论：两组理论模型与仿真曲线精确刻画了临界带宽拐点 (1.6GB/s) 与 QoS 双轨抗干扰能力 (干扰率 1.1%)；硬件到位后即刻开展实测闭环。</a:t>
             </a:r>
           </a:p>
         </p:txBody>
@@ -17476,7 +17143,7 @@
               </a:defRPr>
             </a:pPr>
             <a:r>
-              <a:t>汇报完毕，敬请各位专家批评指正</a:t>
+              <a:t>底座关键技术性能叠加与宏观指标量化导出（Llama-3-70B 闭环）</a:t>
             </a:r>
           </a:p>
         </p:txBody>
@@ -17512,7 +17179,7 @@
               </a:defRPr>
             </a:pPr>
             <a:r>
-              <a:t>KVC 统一异构存储池关键技术优化与验证进展汇报 · Q&amp;A 问答与研讨交流</a:t>
+              <a:t>显式建立 u1~u4 四大技术提升量到综合转化率 u 及 TTFT、TPOT、P99 时延的确定性闭环数学映射</a:t>
             </a:r>
           </a:p>
         </p:txBody>
@@ -17548,7 +17215,1487 @@
               </a:defRPr>
             </a:pPr>
             <a:r>
-              <a:t>08 / 08</a:t>
+              <a:t>08 / 09</a:t>
+            </a:r>
+          </a:p>
+        </p:txBody>
+      </p:sp>
+      <p:sp>
+        <p:nvSpPr>
+          <p:cNvPr id="5" name="Rounded Rectangle 4"/>
+          <p:cNvSpPr/>
+          <p:nvPr/>
+        </p:nvSpPr>
+        <p:spPr>
+          <a:xfrm>
+            <a:off x="548640" y="1051560"/>
+            <a:ext cx="11091672" cy="274320"/>
+          </a:xfrm>
+          <a:prstGeom prst="roundRect">
+            <a:avLst>
+              <a:gd name="adj" fmla="val 2000"/>
+            </a:avLst>
+          </a:prstGeom>
+          <a:solidFill>
+            <a:srgbClr val="EAF3FF"/>
+          </a:solidFill>
+          <a:ln>
+            <a:noFill/>
+          </a:ln>
+        </p:spPr>
+        <p:style>
+          <a:lnRef idx="1">
+            <a:schemeClr val="accent1"/>
+          </a:lnRef>
+          <a:fillRef idx="3">
+            <a:schemeClr val="accent1"/>
+          </a:fillRef>
+          <a:effectRef idx="2">
+            <a:schemeClr val="accent1"/>
+          </a:effectRef>
+          <a:fontRef idx="minor">
+            <a:schemeClr val="lt1"/>
+          </a:fontRef>
+        </p:style>
+        <p:txBody>
+          <a:bodyPr rtlCol="0" anchor="ctr"/>
+          <a:lstStyle/>
+          <a:p>
+            <a:pPr algn="ctr"/>
+          </a:p>
+        </p:txBody>
+      </p:sp>
+      <p:sp>
+        <p:nvSpPr>
+          <p:cNvPr id="6" name="TextBox 5"/>
+          <p:cNvSpPr txBox="1"/>
+          <p:nvPr/>
+        </p:nvSpPr>
+        <p:spPr>
+          <a:xfrm>
+            <a:off x="640080" y="1088136"/>
+            <a:ext cx="10908792" cy="201168"/>
+          </a:xfrm>
+          <a:prstGeom prst="rect">
+            <a:avLst/>
+          </a:prstGeom>
+          <a:noFill/>
+        </p:spPr>
+        <p:txBody>
+          <a:bodyPr wrap="square" lIns="0" rIns="0" tIns="0" bIns="0">
+            <a:spAutoFit/>
+          </a:bodyPr>
+          <a:lstStyle/>
+          <a:p>
+            <a:pPr>
+              <a:defRPr sz="830" b="1">
+                <a:solidFill>
+                  <a:srgbClr val="122A49"/>
+                </a:solidFill>
+                <a:latin typeface="Microsoft YaHei"/>
+              </a:defRPr>
+            </a:pPr>
+            <a:r>
+              <a:t>【统一测算基准模型】Llama-3-70B (TP=8, 80层, 8组GQA) | 单Token显存 320 KB/卡 40 KB | 4K上下文 KVCache 1.28 GB | 目标TTFT基线 272ms, Prefill 247.2ms, 单卡传输 4.5ms</a:t>
+            </a:r>
+          </a:p>
+        </p:txBody>
+      </p:sp>
+      <p:sp>
+        <p:nvSpPr>
+          <p:cNvPr id="7" name="Rounded Rectangle 6"/>
+          <p:cNvSpPr/>
+          <p:nvPr/>
+        </p:nvSpPr>
+        <p:spPr>
+          <a:xfrm>
+            <a:off x="548640" y="1389888"/>
+            <a:ext cx="5413248" cy="950976"/>
+          </a:xfrm>
+          <a:prstGeom prst="roundRect">
+            <a:avLst>
+              <a:gd name="adj" fmla="val 2000"/>
+            </a:avLst>
+          </a:prstGeom>
+          <a:solidFill>
+            <a:srgbClr val="EAF3FF"/>
+          </a:solidFill>
+          <a:ln>
+            <a:noFill/>
+          </a:ln>
+        </p:spPr>
+        <p:style>
+          <a:lnRef idx="1">
+            <a:schemeClr val="accent1"/>
+          </a:lnRef>
+          <a:fillRef idx="3">
+            <a:schemeClr val="accent1"/>
+          </a:fillRef>
+          <a:effectRef idx="2">
+            <a:schemeClr val="accent1"/>
+          </a:effectRef>
+          <a:fontRef idx="minor">
+            <a:schemeClr val="lt1"/>
+          </a:fontRef>
+        </p:style>
+        <p:txBody>
+          <a:bodyPr rtlCol="0" anchor="ctr"/>
+          <a:lstStyle/>
+          <a:p>
+            <a:pPr algn="ctr"/>
+          </a:p>
+        </p:txBody>
+      </p:sp>
+      <p:sp>
+        <p:nvSpPr>
+          <p:cNvPr id="8" name="TextBox 7"/>
+          <p:cNvSpPr txBox="1"/>
+          <p:nvPr/>
+        </p:nvSpPr>
+        <p:spPr>
+          <a:xfrm>
+            <a:off x="658368" y="1444752"/>
+            <a:ext cx="5193792" cy="859536"/>
+          </a:xfrm>
+          <a:prstGeom prst="rect">
+            <a:avLst/>
+          </a:prstGeom>
+          <a:noFill/>
+        </p:spPr>
+        <p:txBody>
+          <a:bodyPr wrap="square" lIns="0" rIns="0" tIns="0" bIns="0">
+            <a:spAutoFit/>
+          </a:bodyPr>
+          <a:lstStyle/>
+          <a:p>
+            <a:r>
+              <a:rPr sz="880" b="1">
+                <a:solidFill>
+                  <a:srgbClr val="122A49"/>
+                </a:solidFill>
+                <a:latin typeface="Microsoft YaHei"/>
+              </a:rPr>
+              <a:t>u1【控制面内存直通】UBMEM 共享内存直达 + RCU 无锁索引  </a:t>
+            </a:r>
+            <a:r>
+              <a:rPr sz="819" b="1">
+                <a:solidFill>
+                  <a:srgbClr val="059669"/>
+                </a:solidFill>
+                <a:latin typeface="Microsoft YaHei"/>
+              </a:rPr>
+              <a:t>[基线 90.0% → 目标 97.0% (Δu1 = +7.0%)]</a:t>
+            </a:r>
+          </a:p>
+          <a:p>
+            <a:pPr>
+              <a:lnSpc>
+                <a:spcPct val="110000"/>
+              </a:lnSpc>
+              <a:spcBef>
+                <a:spcPts val="150"/>
+              </a:spcBef>
+            </a:pPr>
+            <a:r>
+              <a:rPr sz="740" b="1">
+                <a:solidFill>
+                  <a:srgbClr val="122A49"/>
+                </a:solidFill>
+                <a:latin typeface="Microsoft YaHei"/>
+              </a:rPr>
+              <a:t>• 物理机理：</a:t>
+            </a:r>
+            <a:r>
+              <a:rPr sz="730">
+                <a:solidFill>
+                  <a:srgbClr val="1A2533"/>
+                </a:solidFill>
+                <a:latin typeface="Microsoft YaHei"/>
+              </a:rPr>
+              <a:t>总线共享内存直读前缀目录，指令直读消除 Master RPC 寻址与全局锁；单次查表由 21.0ms 降至 18µs。</a:t>
+            </a:r>
+          </a:p>
+          <a:p>
+            <a:pPr>
+              <a:lnSpc>
+                <a:spcPct val="110000"/>
+              </a:lnSpc>
+              <a:spcBef>
+                <a:spcPts val="150"/>
+              </a:spcBef>
+            </a:pPr>
+            <a:r>
+              <a:rPr sz="740" b="1">
+                <a:solidFill>
+                  <a:srgbClr val="122A49"/>
+                </a:solidFill>
+                <a:latin typeface="Microsoft YaHei"/>
+              </a:rPr>
+              <a:t>• 关键收益：</a:t>
+            </a:r>
+            <a:r>
+              <a:rPr sz="730">
+                <a:solidFill>
+                  <a:srgbClr val="1A2533"/>
+                </a:solidFill>
+                <a:latin typeface="Microsoft YaHei"/>
+              </a:rPr>
+              <a:t>固定开销 T_fixed 由 1.60ms 降至 0.575ms (净省 1.03ms)，短前缀盈亏平衡点由 32 降至 10 tokens。</a:t>
+            </a:r>
+          </a:p>
+          <a:p>
+            <a:pPr>
+              <a:lnSpc>
+                <a:spcPct val="110000"/>
+              </a:lnSpc>
+              <a:spcBef>
+                <a:spcPts val="150"/>
+              </a:spcBef>
+            </a:pPr>
+            <a:r>
+              <a:rPr sz="740" b="1">
+                <a:solidFill>
+                  <a:srgbClr val="2D63B8"/>
+                </a:solidFill>
+                <a:latin typeface="Microsoft YaHei"/>
+              </a:rPr>
+              <a:t>• 顶会背书：</a:t>
+            </a:r>
+            <a:r>
+              <a:rPr sz="730">
+                <a:solidFill>
+                  <a:srgbClr val="6B7785"/>
+                </a:solidFill>
+                <a:latin typeface="Microsoft YaHei"/>
+              </a:rPr>
+              <a:t>OSDI '26 FORGE (无锁索引吞吐提升 4.5×，P99 提升 7.5×)；OSDI '26 Duhu (内存控制通道 3.8µs)。</a:t>
+            </a:r>
+          </a:p>
+        </p:txBody>
+      </p:sp>
+      <p:sp>
+        <p:nvSpPr>
+          <p:cNvPr id="9" name="Rounded Rectangle 8"/>
+          <p:cNvSpPr/>
+          <p:nvPr/>
+        </p:nvSpPr>
+        <p:spPr>
+          <a:xfrm>
+            <a:off x="548640" y="2395728"/>
+            <a:ext cx="5413248" cy="950976"/>
+          </a:xfrm>
+          <a:prstGeom prst="roundRect">
+            <a:avLst>
+              <a:gd name="adj" fmla="val 2000"/>
+            </a:avLst>
+          </a:prstGeom>
+          <a:solidFill>
+            <a:srgbClr val="EAF7F0"/>
+          </a:solidFill>
+          <a:ln>
+            <a:noFill/>
+          </a:ln>
+        </p:spPr>
+        <p:style>
+          <a:lnRef idx="1">
+            <a:schemeClr val="accent1"/>
+          </a:lnRef>
+          <a:fillRef idx="3">
+            <a:schemeClr val="accent1"/>
+          </a:fillRef>
+          <a:effectRef idx="2">
+            <a:schemeClr val="accent1"/>
+          </a:effectRef>
+          <a:fontRef idx="minor">
+            <a:schemeClr val="lt1"/>
+          </a:fontRef>
+        </p:style>
+        <p:txBody>
+          <a:bodyPr rtlCol="0" anchor="ctr"/>
+          <a:lstStyle/>
+          <a:p>
+            <a:pPr algn="ctr"/>
+          </a:p>
+        </p:txBody>
+      </p:sp>
+      <p:sp>
+        <p:nvSpPr>
+          <p:cNvPr id="10" name="TextBox 9"/>
+          <p:cNvSpPr txBox="1"/>
+          <p:nvPr/>
+        </p:nvSpPr>
+        <p:spPr>
+          <a:xfrm>
+            <a:off x="658368" y="2450592"/>
+            <a:ext cx="5193792" cy="859536"/>
+          </a:xfrm>
+          <a:prstGeom prst="rect">
+            <a:avLst/>
+          </a:prstGeom>
+          <a:noFill/>
+        </p:spPr>
+        <p:txBody>
+          <a:bodyPr wrap="square" lIns="0" rIns="0" tIns="0" bIns="0">
+            <a:spAutoFit/>
+          </a:bodyPr>
+          <a:lstStyle/>
+          <a:p>
+            <a:r>
+              <a:rPr sz="880" b="1">
+                <a:solidFill>
+                  <a:srgbClr val="122A49"/>
+                </a:solidFill>
+                <a:latin typeface="Microsoft YaHei"/>
+              </a:rPr>
+              <a:t>u2【语义保真与容错】ConsumeEligibility 6维校验 + ViewGuard 租约  </a:t>
+            </a:r>
+            <a:r>
+              <a:rPr sz="819" b="1">
+                <a:solidFill>
+                  <a:srgbClr val="059669"/>
+                </a:solidFill>
+                <a:latin typeface="Microsoft YaHei"/>
+              </a:rPr>
+              <a:t>[基线 95.0% → 目标 99.0% (Δu2 = +4.0%)]</a:t>
+            </a:r>
+          </a:p>
+          <a:p>
+            <a:pPr>
+              <a:lnSpc>
+                <a:spcPct val="110000"/>
+              </a:lnSpc>
+              <a:spcBef>
+                <a:spcPts val="150"/>
+              </a:spcBef>
+            </a:pPr>
+            <a:r>
+              <a:rPr sz="740" b="1">
+                <a:solidFill>
+                  <a:srgbClr val="122A49"/>
+                </a:solidFill>
+                <a:latin typeface="Microsoft YaHei"/>
+              </a:rPr>
+              <a:t>• 物理机理：</a:t>
+            </a:r>
+            <a:r>
+              <a:rPr sz="730">
+                <a:solidFill>
+                  <a:srgbClr val="1A2533"/>
+                </a:solidFill>
+                <a:latin typeface="Microsoft YaHei"/>
+              </a:rPr>
+              <a:t>模型/词表/模板/LoRA/就绪/租约 6 维微秒级合法检查；远端异常与租约超时捕获平滑回滚重算。</a:t>
+            </a:r>
+          </a:p>
+          <a:p>
+            <a:pPr>
+              <a:lnSpc>
+                <a:spcPct val="110000"/>
+              </a:lnSpc>
+              <a:spcBef>
+                <a:spcPts val="150"/>
+              </a:spcBef>
+            </a:pPr>
+            <a:r>
+              <a:rPr sz="740" b="1">
+                <a:solidFill>
+                  <a:srgbClr val="122A49"/>
+                </a:solidFill>
+                <a:latin typeface="Microsoft YaHei"/>
+              </a:rPr>
+              <a:t>• 关键收益：</a:t>
+            </a:r>
+            <a:r>
+              <a:rPr sz="730">
+                <a:solidFill>
+                  <a:srgbClr val="1A2533"/>
+                </a:solidFill>
+                <a:latin typeface="Microsoft YaHei"/>
+              </a:rPr>
+              <a:t>业务读脏与版本不一致事故严格为 0，彻底消除 100~300ms 读脏重试惩罚；迟到加载率 &lt; 1%。</a:t>
+            </a:r>
+          </a:p>
+          <a:p>
+            <a:pPr>
+              <a:lnSpc>
+                <a:spcPct val="110000"/>
+              </a:lnSpc>
+              <a:spcBef>
+                <a:spcPts val="150"/>
+              </a:spcBef>
+            </a:pPr>
+            <a:r>
+              <a:rPr sz="740" b="1">
+                <a:solidFill>
+                  <a:srgbClr val="2D63B8"/>
+                </a:solidFill>
+                <a:latin typeface="Microsoft YaHei"/>
+              </a:rPr>
+              <a:t>• 顶会背书：</a:t>
+            </a:r>
+            <a:r>
+              <a:rPr sz="730">
+                <a:solidFill>
+                  <a:srgbClr val="6B7785"/>
+                </a:solidFill>
+                <a:latin typeface="Microsoft YaHei"/>
+              </a:rPr>
+              <a:t>SIGMOD '26 Beluga (全命中 QPS 达 7.35×，无守卫首运行 P99 恶化至 44.6s)；NSDI '26 DroidSpeak。</a:t>
+            </a:r>
+          </a:p>
+        </p:txBody>
+      </p:sp>
+      <p:sp>
+        <p:nvSpPr>
+          <p:cNvPr id="11" name="Rounded Rectangle 10"/>
+          <p:cNvSpPr/>
+          <p:nvPr/>
+        </p:nvSpPr>
+        <p:spPr>
+          <a:xfrm>
+            <a:off x="548640" y="3401568"/>
+            <a:ext cx="5413248" cy="950976"/>
+          </a:xfrm>
+          <a:prstGeom prst="roundRect">
+            <a:avLst>
+              <a:gd name="adj" fmla="val 2000"/>
+            </a:avLst>
+          </a:prstGeom>
+          <a:solidFill>
+            <a:srgbClr val="EAF3FF"/>
+          </a:solidFill>
+          <a:ln>
+            <a:noFill/>
+          </a:ln>
+        </p:spPr>
+        <p:style>
+          <a:lnRef idx="1">
+            <a:schemeClr val="accent1"/>
+          </a:lnRef>
+          <a:fillRef idx="3">
+            <a:schemeClr val="accent1"/>
+          </a:fillRef>
+          <a:effectRef idx="2">
+            <a:schemeClr val="accent1"/>
+          </a:effectRef>
+          <a:fontRef idx="minor">
+            <a:schemeClr val="lt1"/>
+          </a:fontRef>
+        </p:style>
+        <p:txBody>
+          <a:bodyPr rtlCol="0" anchor="ctr"/>
+          <a:lstStyle/>
+          <a:p>
+            <a:pPr algn="ctr"/>
+          </a:p>
+        </p:txBody>
+      </p:sp>
+      <p:sp>
+        <p:nvSpPr>
+          <p:cNvPr id="12" name="TextBox 11"/>
+          <p:cNvSpPr txBox="1"/>
+          <p:nvPr/>
+        </p:nvSpPr>
+        <p:spPr>
+          <a:xfrm>
+            <a:off x="658368" y="3456432"/>
+            <a:ext cx="5193792" cy="859536"/>
+          </a:xfrm>
+          <a:prstGeom prst="rect">
+            <a:avLst/>
+          </a:prstGeom>
+          <a:noFill/>
+        </p:spPr>
+        <p:txBody>
+          <a:bodyPr wrap="square" lIns="0" rIns="0" tIns="0" bIns="0">
+            <a:spAutoFit/>
+          </a:bodyPr>
+          <a:lstStyle/>
+          <a:p>
+            <a:r>
+              <a:rPr sz="880" b="1">
+                <a:solidFill>
+                  <a:srgbClr val="122A49"/>
+                </a:solidFill>
+                <a:latin typeface="Microsoft YaHei"/>
+              </a:rPr>
+              <a:t>u3【传输因果掩盖】URMA 零数据拷贝 + 80层逐层因果隐藏流水  </a:t>
+            </a:r>
+            <a:r>
+              <a:rPr sz="819" b="1">
+                <a:solidFill>
+                  <a:srgbClr val="059669"/>
+                </a:solidFill>
+                <a:latin typeface="Microsoft YaHei"/>
+              </a:rPr>
+              <a:t>[基线 95.0% → 目标 99.0% (Δu3 = +4.0%)]</a:t>
+            </a:r>
+          </a:p>
+          <a:p>
+            <a:pPr>
+              <a:lnSpc>
+                <a:spcPct val="110000"/>
+              </a:lnSpc>
+              <a:spcBef>
+                <a:spcPts val="150"/>
+              </a:spcBef>
+            </a:pPr>
+            <a:r>
+              <a:rPr sz="740" b="1">
+                <a:solidFill>
+                  <a:srgbClr val="122A49"/>
+                </a:solidFill>
+                <a:latin typeface="Microsoft YaHei"/>
+              </a:rPr>
+              <a:t>• 物理机理：</a:t>
+            </a:r>
+            <a:r>
+              <a:rPr sz="730">
+                <a:solidFill>
+                  <a:srgbClr val="1A2533"/>
+                </a:solidFill>
+                <a:latin typeface="Microsoft YaHei"/>
+              </a:rPr>
+              <a:t>Host CPU 仅下发描述符 (Payload 零拷贝)；单层计算 c=2.75ms 远大于传输 x=0.31ms，79 层全掩盖。</a:t>
+            </a:r>
+          </a:p>
+          <a:p>
+            <a:pPr>
+              <a:lnSpc>
+                <a:spcPct val="110000"/>
+              </a:lnSpc>
+              <a:spcBef>
+                <a:spcPts val="150"/>
+              </a:spcBef>
+            </a:pPr>
+            <a:r>
+              <a:rPr sz="740" b="1">
+                <a:solidFill>
+                  <a:srgbClr val="122A49"/>
+                </a:solidFill>
+                <a:latin typeface="Microsoft YaHei"/>
+              </a:rPr>
+              <a:t>• 关键收益：</a:t>
+            </a:r>
+            <a:r>
+              <a:rPr sz="730">
+                <a:solidFill>
+                  <a:srgbClr val="1A2533"/>
+                </a:solidFill>
+                <a:latin typeface="Microsoft YaHei"/>
+              </a:rPr>
+              <a:t>因果流水掩盖率达 98.7% (仅暴露首层 0.31ms)；加载耗时 T_load 由 10.0ms 降至 4.5ms (净省 5.5ms)。</a:t>
+            </a:r>
+          </a:p>
+          <a:p>
+            <a:pPr>
+              <a:lnSpc>
+                <a:spcPct val="110000"/>
+              </a:lnSpc>
+              <a:spcBef>
+                <a:spcPts val="150"/>
+              </a:spcBef>
+            </a:pPr>
+            <a:r>
+              <a:rPr sz="740" b="1">
+                <a:solidFill>
+                  <a:srgbClr val="2D63B8"/>
+                </a:solidFill>
+                <a:latin typeface="Microsoft YaHei"/>
+              </a:rPr>
+              <a:t>• 顶会背书：</a:t>
+            </a:r>
+            <a:r>
+              <a:rPr sz="730">
+                <a:solidFill>
+                  <a:srgbClr val="6B7785"/>
+                </a:solidFill>
+                <a:latin typeface="Microsoft YaHei"/>
+              </a:rPr>
+              <a:t>OSDI '26 DirectKV (消除缓冲时延降 49%，显存省 43%)；NSDI '26 SYMPHONY (关流水吞吐降 18.4%~7×)。</a:t>
+            </a:r>
+          </a:p>
+        </p:txBody>
+      </p:sp>
+      <p:sp>
+        <p:nvSpPr>
+          <p:cNvPr id="13" name="Rounded Rectangle 12"/>
+          <p:cNvSpPr/>
+          <p:nvPr/>
+        </p:nvSpPr>
+        <p:spPr>
+          <a:xfrm>
+            <a:off x="548640" y="4407408"/>
+            <a:ext cx="5413248" cy="950976"/>
+          </a:xfrm>
+          <a:prstGeom prst="roundRect">
+            <a:avLst>
+              <a:gd name="adj" fmla="val 2000"/>
+            </a:avLst>
+          </a:prstGeom>
+          <a:solidFill>
+            <a:srgbClr val="FFF5D9"/>
+          </a:solidFill>
+          <a:ln>
+            <a:noFill/>
+          </a:ln>
+        </p:spPr>
+        <p:style>
+          <a:lnRef idx="1">
+            <a:schemeClr val="accent1"/>
+          </a:lnRef>
+          <a:fillRef idx="3">
+            <a:schemeClr val="accent1"/>
+          </a:fillRef>
+          <a:effectRef idx="2">
+            <a:schemeClr val="accent1"/>
+          </a:effectRef>
+          <a:fontRef idx="minor">
+            <a:schemeClr val="lt1"/>
+          </a:fontRef>
+        </p:style>
+        <p:txBody>
+          <a:bodyPr rtlCol="0" anchor="ctr"/>
+          <a:lstStyle/>
+          <a:p>
+            <a:pPr algn="ctr"/>
+          </a:p>
+        </p:txBody>
+      </p:sp>
+      <p:sp>
+        <p:nvSpPr>
+          <p:cNvPr id="14" name="TextBox 13"/>
+          <p:cNvSpPr txBox="1"/>
+          <p:nvPr/>
+        </p:nvSpPr>
+        <p:spPr>
+          <a:xfrm>
+            <a:off x="658368" y="4462272"/>
+            <a:ext cx="5193792" cy="859536"/>
+          </a:xfrm>
+          <a:prstGeom prst="rect">
+            <a:avLst/>
+          </a:prstGeom>
+          <a:noFill/>
+        </p:spPr>
+        <p:txBody>
+          <a:bodyPr wrap="square" lIns="0" rIns="0" tIns="0" bIns="0">
+            <a:spAutoFit/>
+          </a:bodyPr>
+          <a:lstStyle/>
+          <a:p>
+            <a:r>
+              <a:rPr sz="880" b="1">
+                <a:solidFill>
+                  <a:srgbClr val="122A49"/>
+                </a:solidFill>
+                <a:latin typeface="Microsoft YaHei"/>
+              </a:rPr>
+              <a:t>u4【混压流控与共识】TC0/TC1 双轨 QoS + 令牌桶 + RankConsensus  </a:t>
+            </a:r>
+            <a:r>
+              <a:rPr sz="819" b="1">
+                <a:solidFill>
+                  <a:srgbClr val="059669"/>
+                </a:solidFill>
+                <a:latin typeface="Microsoft YaHei"/>
+              </a:rPr>
+              <a:t>[基线 98.0% → 目标 99.0% (Δu4 = +1.0%)]</a:t>
+            </a:r>
+          </a:p>
+          <a:p>
+            <a:pPr>
+              <a:lnSpc>
+                <a:spcPct val="110000"/>
+              </a:lnSpc>
+              <a:spcBef>
+                <a:spcPts val="150"/>
+              </a:spcBef>
+            </a:pPr>
+            <a:r>
+              <a:rPr sz="740" b="1">
+                <a:solidFill>
+                  <a:srgbClr val="122A49"/>
+                </a:solidFill>
+                <a:latin typeface="Microsoft YaHei"/>
+              </a:rPr>
+              <a:t>• 物理机理：</a:t>
+            </a:r>
+            <a:r>
+              <a:rPr sz="730">
+                <a:solidFill>
+                  <a:srgbClr val="1A2533"/>
+                </a:solidFill>
+                <a:latin typeface="Microsoft YaHei"/>
+              </a:rPr>
+              <a:t>DSCP/CoS 硬件优先级队列硬隔离与微秒退避；令牌桶削峰防 Incast；共享内存 TP=8 原子同步。</a:t>
+            </a:r>
+          </a:p>
+          <a:p>
+            <a:pPr>
+              <a:lnSpc>
+                <a:spcPct val="110000"/>
+              </a:lnSpc>
+              <a:spcBef>
+                <a:spcPts val="150"/>
+              </a:spcBef>
+            </a:pPr>
+            <a:r>
+              <a:rPr sz="740" b="1">
+                <a:solidFill>
+                  <a:srgbClr val="122A49"/>
+                </a:solidFill>
+                <a:latin typeface="Microsoft YaHei"/>
+              </a:rPr>
+              <a:t>• 关键收益：</a:t>
+            </a:r>
+            <a:r>
+              <a:rPr sz="730">
+                <a:solidFill>
+                  <a:srgbClr val="1A2533"/>
+                </a:solidFill>
+                <a:latin typeface="Microsoft YaHei"/>
+              </a:rPr>
+              <a:t>显存争用扰动锁死在 β ≤ 1.8% (基线 16.5%)；多卡偏斜比从 2.85 压低至 1.14，同步延迟降至 0.08ms。</a:t>
+            </a:r>
+          </a:p>
+          <a:p>
+            <a:pPr>
+              <a:lnSpc>
+                <a:spcPct val="110000"/>
+              </a:lnSpc>
+              <a:spcBef>
+                <a:spcPts val="150"/>
+              </a:spcBef>
+            </a:pPr>
+            <a:r>
+              <a:rPr sz="740" b="1">
+                <a:solidFill>
+                  <a:srgbClr val="2D63B8"/>
+                </a:solidFill>
+                <a:latin typeface="Microsoft YaHei"/>
+              </a:rPr>
+              <a:t>• 顶会背书：</a:t>
+            </a:r>
+            <a:r>
+              <a:rPr sz="730">
+                <a:solidFill>
+                  <a:srgbClr val="6B7785"/>
+                </a:solidFill>
+                <a:latin typeface="Microsoft YaHei"/>
+              </a:rPr>
+              <a:t>FAST '26 Bidaw (双队列调度 P99 降 47.03%)；NSDI '26 MemChannel (大流混压恶化 6.9×，流控降 43%)。</a:t>
+            </a:r>
+          </a:p>
+        </p:txBody>
+      </p:sp>
+      <p:pic>
+        <p:nvPicPr>
+          <p:cNvPr id="15" name="Picture 14" descr="formula_slide8_funnel_breakeven.png"/>
+          <p:cNvPicPr>
+            <a:picLocks noChangeAspect="1"/>
+          </p:cNvPicPr>
+          <p:nvPr/>
+        </p:nvPicPr>
+        <p:blipFill>
+          <a:blip r:embed="rId2"/>
+          <a:stretch>
+            <a:fillRect/>
+          </a:stretch>
+        </p:blipFill>
+        <p:spPr>
+          <a:xfrm>
+            <a:off x="548640" y="5413248"/>
+            <a:ext cx="5413248" cy="585216"/>
+          </a:xfrm>
+          <a:prstGeom prst="rect">
+            <a:avLst/>
+          </a:prstGeom>
+        </p:spPr>
+      </p:pic>
+      <p:sp>
+        <p:nvSpPr>
+          <p:cNvPr id="16" name="TextBox 15"/>
+          <p:cNvSpPr txBox="1"/>
+          <p:nvPr/>
+        </p:nvSpPr>
+        <p:spPr>
+          <a:xfrm>
+            <a:off x="585216" y="6016752"/>
+            <a:ext cx="5340096" cy="164592"/>
+          </a:xfrm>
+          <a:prstGeom prst="rect">
+            <a:avLst/>
+          </a:prstGeom>
+          <a:noFill/>
+        </p:spPr>
+        <p:txBody>
+          <a:bodyPr wrap="square" lIns="0" rIns="0" tIns="0" bIns="0">
+            <a:spAutoFit/>
+          </a:bodyPr>
+          <a:lstStyle/>
+          <a:p>
+            <a:r>
+              <a:rPr sz="740" b="1">
+                <a:solidFill>
+                  <a:srgbClr val="2D63B8"/>
+                </a:solidFill>
+                <a:latin typeface="Microsoft YaHei"/>
+              </a:rPr>
+              <a:t>• 漏斗收窄效应： </a:t>
+            </a:r>
+            <a:r>
+              <a:rPr sz="730">
+                <a:solidFill>
+                  <a:srgbClr val="1A2533"/>
+                </a:solidFill>
+                <a:latin typeface="Microsoft YaHei"/>
+              </a:rPr>
+              <a:t>综合转化率跃升 +14.52%，将 Saved-Prefill 获益门槛从 32 tokens 显著拓宽至 10 tokens。</a:t>
+            </a:r>
+          </a:p>
+        </p:txBody>
+      </p:sp>
+      <p:pic>
+        <p:nvPicPr>
+          <p:cNvPr id="17" name="Picture 16" descr="formula_slide8_ttft_stack.png"/>
+          <p:cNvPicPr>
+            <a:picLocks noChangeAspect="1"/>
+          </p:cNvPicPr>
+          <p:nvPr/>
+        </p:nvPicPr>
+        <p:blipFill>
+          <a:blip r:embed="rId3"/>
+          <a:stretch>
+            <a:fillRect/>
+          </a:stretch>
+        </p:blipFill>
+        <p:spPr>
+          <a:xfrm>
+            <a:off x="6227064" y="1389888"/>
+            <a:ext cx="5413248" cy="585216"/>
+          </a:xfrm>
+          <a:prstGeom prst="rect">
+            <a:avLst/>
+          </a:prstGeom>
+        </p:spPr>
+      </p:pic>
+      <p:sp>
+        <p:nvSpPr>
+          <p:cNvPr id="18" name="TextBox 17"/>
+          <p:cNvSpPr txBox="1"/>
+          <p:nvPr/>
+        </p:nvSpPr>
+        <p:spPr>
+          <a:xfrm>
+            <a:off x="6263640" y="1993392"/>
+            <a:ext cx="5340096" cy="365760"/>
+          </a:xfrm>
+          <a:prstGeom prst="rect">
+            <a:avLst/>
+          </a:prstGeom>
+          <a:noFill/>
+        </p:spPr>
+        <p:txBody>
+          <a:bodyPr wrap="square" lIns="0" rIns="0" tIns="0" bIns="0">
+            <a:spAutoFit/>
+          </a:bodyPr>
+          <a:lstStyle/>
+          <a:p>
+            <a:pPr>
+              <a:lnSpc>
+                <a:spcPct val="108000"/>
+              </a:lnSpc>
+            </a:pPr>
+            <a:r>
+              <a:rPr sz="740" b="1">
+                <a:solidFill>
+                  <a:srgbClr val="122A49"/>
+                </a:solidFill>
+                <a:latin typeface="Microsoft YaHei"/>
+              </a:rPr>
+              <a:t>• 机理闭环： </a:t>
+            </a:r>
+            <a:r>
+              <a:rPr sz="730">
+                <a:solidFill>
+                  <a:srgbClr val="1A2533"/>
+                </a:solidFill>
+                <a:latin typeface="Microsoft YaHei"/>
+              </a:rPr>
+              <a:t>三步线性加和 ΔTTFT = ΔT_fixed(u1) + r(T_prefill - T_load)Δu + r·u·ΔT_load(u3) = 7.24ms (↓14.6%)。</a:t>
+            </a:r>
+          </a:p>
+          <a:p>
+            <a:pPr>
+              <a:lnSpc>
+                <a:spcPct val="108000"/>
+              </a:lnSpc>
+              <a:spcBef>
+                <a:spcPts val="150"/>
+              </a:spcBef>
+            </a:pPr>
+            <a:r>
+              <a:rPr sz="740" b="1">
+                <a:solidFill>
+                  <a:srgbClr val="122A49"/>
+                </a:solidFill>
+                <a:latin typeface="Microsoft YaHei"/>
+              </a:rPr>
+              <a:t>• 算例达成： </a:t>
+            </a:r>
+            <a:r>
+              <a:rPr sz="730">
+                <a:solidFill>
+                  <a:srgbClr val="1A2533"/>
+                </a:solidFill>
+                <a:latin typeface="Microsoft YaHei"/>
+              </a:rPr>
+              <a:t>4K 上下文净提速 51.1ms (272ms → 220.8ms, ↓18.8%~52.6%)；背书：OSDI '26 DirectKV (时延直降 49%)。</a:t>
+            </a:r>
+          </a:p>
+        </p:txBody>
+      </p:sp>
+      <p:pic>
+        <p:nvPicPr>
+          <p:cNvPr id="19" name="Picture 18" descr="formula_slide8_tpot_qos.png"/>
+          <p:cNvPicPr>
+            <a:picLocks noChangeAspect="1"/>
+          </p:cNvPicPr>
+          <p:nvPr/>
+        </p:nvPicPr>
+        <p:blipFill>
+          <a:blip r:embed="rId4"/>
+          <a:stretch>
+            <a:fillRect/>
+          </a:stretch>
+        </p:blipFill>
+        <p:spPr>
+          <a:xfrm>
+            <a:off x="6227064" y="2432304"/>
+            <a:ext cx="5413248" cy="585216"/>
+          </a:xfrm>
+          <a:prstGeom prst="rect">
+            <a:avLst/>
+          </a:prstGeom>
+        </p:spPr>
+      </p:pic>
+      <p:sp>
+        <p:nvSpPr>
+          <p:cNvPr id="20" name="TextBox 19"/>
+          <p:cNvSpPr txBox="1"/>
+          <p:nvPr/>
+        </p:nvSpPr>
+        <p:spPr>
+          <a:xfrm>
+            <a:off x="6263640" y="3035808"/>
+            <a:ext cx="5340096" cy="365760"/>
+          </a:xfrm>
+          <a:prstGeom prst="rect">
+            <a:avLst/>
+          </a:prstGeom>
+          <a:noFill/>
+        </p:spPr>
+        <p:txBody>
+          <a:bodyPr wrap="square" lIns="0" rIns="0" tIns="0" bIns="0">
+            <a:spAutoFit/>
+          </a:bodyPr>
+          <a:lstStyle/>
+          <a:p>
+            <a:pPr>
+              <a:lnSpc>
+                <a:spcPct val="108000"/>
+              </a:lnSpc>
+            </a:pPr>
+            <a:r>
+              <a:rPr sz="740" b="1">
+                <a:solidFill>
+                  <a:srgbClr val="122A49"/>
+                </a:solidFill>
+                <a:latin typeface="Microsoft YaHei"/>
+              </a:rPr>
+              <a:t>• 机理闭环： </a:t>
+            </a:r>
+            <a:r>
+              <a:rPr sz="730">
+                <a:solidFill>
+                  <a:srgbClr val="1A2533"/>
+                </a:solidFill>
+                <a:latin typeface="Microsoft YaHei"/>
+              </a:rPr>
+              <a:t>Decode 访存耗时占比 85%；开源无隔离 β=16.5% 致干扰率 16.8%；TC0/TC1 硬隔离将损失锁死在 β ≤ 1.8%。</a:t>
+            </a:r>
+          </a:p>
+          <a:p>
+            <a:pPr>
+              <a:lnSpc>
+                <a:spcPct val="108000"/>
+              </a:lnSpc>
+              <a:spcBef>
+                <a:spcPts val="150"/>
+              </a:spcBef>
+            </a:pPr>
+            <a:r>
+              <a:rPr sz="740" b="1">
+                <a:solidFill>
+                  <a:srgbClr val="122A49"/>
+                </a:solidFill>
+                <a:latin typeface="Microsoft YaHei"/>
+              </a:rPr>
+              <a:t>• 算例达成： </a:t>
+            </a:r>
+            <a:r>
+              <a:rPr sz="730">
+                <a:solidFill>
+                  <a:srgbClr val="1A2533"/>
+                </a:solidFill>
+                <a:latin typeface="Microsoft YaHei"/>
+              </a:rPr>
+              <a:t>前台在线 TPOT 干扰率仅 1.57% (远优于 ≤ 3% 工业红线)；背书：FAST '26 Bidaw (双队列调度 P99 降 47%)。</a:t>
+            </a:r>
+          </a:p>
+        </p:txBody>
+      </p:sp>
+      <p:pic>
+        <p:nvPicPr>
+          <p:cNvPr id="21" name="Picture 20" descr="formula_slide8_p99_consensus.png"/>
+          <p:cNvPicPr>
+            <a:picLocks noChangeAspect="1"/>
+          </p:cNvPicPr>
+          <p:nvPr/>
+        </p:nvPicPr>
+        <p:blipFill>
+          <a:blip r:embed="rId5"/>
+          <a:stretch>
+            <a:fillRect/>
+          </a:stretch>
+        </p:blipFill>
+        <p:spPr>
+          <a:xfrm>
+            <a:off x="6227064" y="3474720"/>
+            <a:ext cx="5413248" cy="585216"/>
+          </a:xfrm>
+          <a:prstGeom prst="rect">
+            <a:avLst/>
+          </a:prstGeom>
+        </p:spPr>
+      </p:pic>
+      <p:sp>
+        <p:nvSpPr>
+          <p:cNvPr id="22" name="TextBox 21"/>
+          <p:cNvSpPr txBox="1"/>
+          <p:nvPr/>
+        </p:nvSpPr>
+        <p:spPr>
+          <a:xfrm>
+            <a:off x="6263640" y="4078224"/>
+            <a:ext cx="5340096" cy="365760"/>
+          </a:xfrm>
+          <a:prstGeom prst="rect">
+            <a:avLst/>
+          </a:prstGeom>
+          <a:noFill/>
+        </p:spPr>
+        <p:txBody>
+          <a:bodyPr wrap="square" lIns="0" rIns="0" tIns="0" bIns="0">
+            <a:spAutoFit/>
+          </a:bodyPr>
+          <a:lstStyle/>
+          <a:p>
+            <a:pPr>
+              <a:lnSpc>
+                <a:spcPct val="108000"/>
+              </a:lnSpc>
+            </a:pPr>
+            <a:r>
+              <a:rPr sz="740" b="1">
+                <a:solidFill>
+                  <a:srgbClr val="122A49"/>
+                </a:solidFill>
+                <a:latin typeface="Microsoft YaHei"/>
+              </a:rPr>
+              <a:t>• 机理闭环： </a:t>
+            </a:r>
+            <a:r>
+              <a:rPr sz="730">
+                <a:solidFill>
+                  <a:srgbClr val="1A2533"/>
+                </a:solidFill>
+                <a:latin typeface="Microsoft YaHei"/>
+              </a:rPr>
+              <a:t>令牌桶突发整形 σ ≤ 16MB 满足排队界 D* ≤ 2ms 根除 Incast；多卡原子协同将偏斜比由 2.85 压低至 1.14。</a:t>
+            </a:r>
+          </a:p>
+          <a:p>
+            <a:pPr>
+              <a:lnSpc>
+                <a:spcPct val="108000"/>
+              </a:lnSpc>
+              <a:spcBef>
+                <a:spcPts val="150"/>
+              </a:spcBef>
+            </a:pPr>
+            <a:r>
+              <a:rPr sz="740" b="1">
+                <a:solidFill>
+                  <a:srgbClr val="122A49"/>
+                </a:solidFill>
+                <a:latin typeface="Microsoft YaHei"/>
+              </a:rPr>
+              <a:t>• 算例达成： </a:t>
+            </a:r>
+            <a:r>
+              <a:rPr sz="730">
+                <a:solidFill>
+                  <a:srgbClr val="1A2533"/>
+                </a:solidFill>
+                <a:latin typeface="Microsoft YaHei"/>
+              </a:rPr>
+              <a:t>16 并发混压下 P99 TTFT 缩短 46.0% (468.5ms → 253.3ms，净削减 215ms)；背书：NSDI '26 Libra (消除慢卡)。</a:t>
+            </a:r>
+          </a:p>
+        </p:txBody>
+      </p:sp>
+      <p:sp>
+        <p:nvSpPr>
+          <p:cNvPr id="23" name="Rounded Rectangle 22"/>
+          <p:cNvSpPr/>
+          <p:nvPr/>
+        </p:nvSpPr>
+        <p:spPr>
+          <a:xfrm>
+            <a:off x="6227064" y="4535424"/>
+            <a:ext cx="5413248" cy="1645920"/>
+          </a:xfrm>
+          <a:prstGeom prst="roundRect">
+            <a:avLst>
+              <a:gd name="adj" fmla="val 2000"/>
+            </a:avLst>
+          </a:prstGeom>
+          <a:solidFill>
+            <a:srgbClr val="FFF0F0"/>
+          </a:solidFill>
+          <a:ln>
+            <a:noFill/>
+          </a:ln>
+        </p:spPr>
+        <p:style>
+          <a:lnRef idx="1">
+            <a:schemeClr val="accent1"/>
+          </a:lnRef>
+          <a:fillRef idx="3">
+            <a:schemeClr val="accent1"/>
+          </a:fillRef>
+          <a:effectRef idx="2">
+            <a:schemeClr val="accent1"/>
+          </a:effectRef>
+          <a:fontRef idx="minor">
+            <a:schemeClr val="lt1"/>
+          </a:fontRef>
+        </p:style>
+        <p:txBody>
+          <a:bodyPr rtlCol="0" anchor="ctr"/>
+          <a:lstStyle/>
+          <a:p>
+            <a:pPr algn="ctr"/>
+          </a:p>
+        </p:txBody>
+      </p:sp>
+      <p:sp>
+        <p:nvSpPr>
+          <p:cNvPr id="24" name="TextBox 23"/>
+          <p:cNvSpPr txBox="1"/>
+          <p:nvPr/>
+        </p:nvSpPr>
+        <p:spPr>
+          <a:xfrm>
+            <a:off x="6336792" y="4608576"/>
+            <a:ext cx="5193792" cy="1536192"/>
+          </a:xfrm>
+          <a:prstGeom prst="rect">
+            <a:avLst/>
+          </a:prstGeom>
+          <a:noFill/>
+        </p:spPr>
+        <p:txBody>
+          <a:bodyPr wrap="square" lIns="0" rIns="0" tIns="0" bIns="0">
+            <a:spAutoFit/>
+          </a:bodyPr>
+          <a:lstStyle/>
+          <a:p>
+            <a:pPr>
+              <a:defRPr sz="880" b="1">
+                <a:solidFill>
+                  <a:srgbClr val="C00000"/>
+                </a:solidFill>
+                <a:latin typeface="Microsoft YaHei"/>
+              </a:defRPr>
+            </a:pPr>
+            <a:r>
+              <a:t>【TCO 投资回报综合对账】底层工程技术驱动业务 ROI 改善的三大硬核逻辑</a:t>
+            </a:r>
+          </a:p>
+          <a:p>
+            <a:pPr>
+              <a:lnSpc>
+                <a:spcPct val="112000"/>
+              </a:lnSpc>
+              <a:spcBef>
+                <a:spcPts val="300"/>
+              </a:spcBef>
+            </a:pPr>
+            <a:r>
+              <a:rPr sz="750" b="1">
+                <a:solidFill>
+                  <a:srgbClr val="122A49"/>
+                </a:solidFill>
+                <a:latin typeface="Microsoft YaHei"/>
+              </a:rPr>
+              <a:t>• 算力维度（释放 Prefill 算力）：</a:t>
+            </a:r>
+            <a:r>
+              <a:rPr sz="740">
+                <a:solidFill>
+                  <a:srgbClr val="1A2533"/>
+                </a:solidFill>
+                <a:latin typeface="Microsoft YaHei"/>
+              </a:rPr>
+              <a:t>通过 Saved-Prefill 节省 18.8%~52.6% 冗余计算，集群算力得以专注用于有效 Decode 生成；单次有效请求综合计算成本降低 ≥ 35%。</a:t>
+            </a:r>
+          </a:p>
+          <a:p>
+            <a:pPr>
+              <a:lnSpc>
+                <a:spcPct val="112000"/>
+              </a:lnSpc>
+              <a:spcBef>
+                <a:spcPts val="300"/>
+              </a:spcBef>
+            </a:pPr>
+            <a:r>
+              <a:rPr sz="750" b="1">
+                <a:solidFill>
+                  <a:srgbClr val="122A49"/>
+                </a:solidFill>
+                <a:latin typeface="Microsoft YaHei"/>
+              </a:rPr>
+              <a:t>• 硬件维度（突破物理显存成本墙）：</a:t>
+            </a:r>
+            <a:r>
+              <a:rPr sz="740">
+                <a:solidFill>
+                  <a:srgbClr val="1A2533"/>
+                </a:solidFill>
+                <a:latin typeface="Microsoft YaHei"/>
+              </a:rPr>
+              <a:t>KVObject 跨介质异步下沉 NVMe SSD，单机等效显存容量提升 30%~50%，同等显存配置下支撑高 1.4~1.8 倍的并发请求，大幅降低整机 TCO。</a:t>
+            </a:r>
+          </a:p>
+          <a:p>
+            <a:pPr>
+              <a:lnSpc>
+                <a:spcPct val="112000"/>
+              </a:lnSpc>
+              <a:spcBef>
+                <a:spcPts val="300"/>
+              </a:spcBef>
+            </a:pPr>
+            <a:r>
+              <a:rPr sz="750" b="1">
+                <a:solidFill>
+                  <a:srgbClr val="122A49"/>
+                </a:solidFill>
+                <a:latin typeface="Microsoft YaHei"/>
+              </a:rPr>
+              <a:t>• 业务维度（收敛长尾保障 SLO）：</a:t>
+            </a:r>
+            <a:r>
+              <a:rPr sz="740">
+                <a:solidFill>
+                  <a:srgbClr val="1A2533"/>
+                </a:solidFill>
+                <a:latin typeface="Microsoft YaHei"/>
+              </a:rPr>
+              <a:t>P99 尾部抖动削减 215ms (↓46.0%)，前台 TPOT 干扰率严格锁在 1.57%，驱动在线业务满足 SLO 延时要求的有效达标率由 95% 跃升至 98% 以上。</a:t>
+            </a:r>
+          </a:p>
+        </p:txBody>
+      </p:sp>
+      <p:sp>
+        <p:nvSpPr>
+          <p:cNvPr id="25" name="Rectangle 24"/>
+          <p:cNvSpPr/>
+          <p:nvPr/>
+        </p:nvSpPr>
+        <p:spPr>
+          <a:xfrm>
+            <a:off x="548640" y="6327648"/>
+            <a:ext cx="11091672" cy="320040"/>
+          </a:xfrm>
+          <a:prstGeom prst="rect">
+            <a:avLst/>
+          </a:prstGeom>
+          <a:solidFill>
+            <a:srgbClr val="2D63B8"/>
+          </a:solidFill>
+          <a:ln>
+            <a:noFill/>
+          </a:ln>
+        </p:spPr>
+        <p:style>
+          <a:lnRef idx="1">
+            <a:schemeClr val="accent1"/>
+          </a:lnRef>
+          <a:fillRef idx="3">
+            <a:schemeClr val="accent1"/>
+          </a:fillRef>
+          <a:effectRef idx="2">
+            <a:schemeClr val="accent1"/>
+          </a:effectRef>
+          <a:fontRef idx="minor">
+            <a:schemeClr val="lt1"/>
+          </a:fontRef>
+        </p:style>
+        <p:txBody>
+          <a:bodyPr rtlCol="0" anchor="ctr" wrap="square" lIns="137160" tIns="18288" bIns="18288"/>
+          <a:lstStyle/>
+          <a:p>
+            <a:pPr algn="ctr">
+              <a:defRPr sz="1100" b="1">
+                <a:solidFill>
+                  <a:srgbClr val="FFFFFF"/>
+                </a:solidFill>
+                <a:latin typeface="Microsoft YaHei"/>
+              </a:defRPr>
+            </a:pPr>
+            <a:r>
+              <a:t>核心结论：u1~u4 四大关键技术通过严密数学公式实现宏观指标确定性闭环：TTFT 净提速 18.8%~52.6%、前台 TPOT 干扰率仅 1.57%、P99 尾部时延缩短 46.0%！</a:t>
+            </a:r>
+          </a:p>
+        </p:txBody>
+      </p:sp>
+    </p:spTree>
+  </p:cSld>
+  <p:clrMapOvr>
+    <a:masterClrMapping/>
+  </p:clrMapOvr>
+</p:sld>
+</file>
+
+<file path=ppt/slides/slide9.xml><?xml version="1.0" encoding="utf-8"?>
+<p:sld xmlns:a="http://schemas.openxmlformats.org/drawingml/2006/main" xmlns:p="http://schemas.openxmlformats.org/presentationml/2006/main" xmlns:r="http://schemas.openxmlformats.org/officeDocument/2006/relationships">
+  <p:cSld>
+    <p:spTree>
+      <p:nvGrpSpPr>
+        <p:cNvPr id="1" name=""/>
+        <p:cNvGrpSpPr/>
+        <p:nvPr/>
+      </p:nvGrpSpPr>
+      <p:grpSpPr/>
+      <p:sp>
+        <p:nvSpPr>
+          <p:cNvPr id="2" name="TextBox 1"/>
+          <p:cNvSpPr txBox="1"/>
+          <p:nvPr/>
+        </p:nvSpPr>
+        <p:spPr>
+          <a:xfrm>
+            <a:off x="621792" y="292608"/>
+            <a:ext cx="9875520" cy="438912"/>
+          </a:xfrm>
+          <a:prstGeom prst="rect">
+            <a:avLst/>
+          </a:prstGeom>
+          <a:noFill/>
+        </p:spPr>
+        <p:txBody>
+          <a:bodyPr wrap="square" lIns="0" rIns="0" tIns="0" bIns="0">
+            <a:spAutoFit/>
+          </a:bodyPr>
+          <a:lstStyle/>
+          <a:p>
+            <a:pPr>
+              <a:defRPr sz="2100" b="1">
+                <a:solidFill>
+                  <a:srgbClr val="122A49"/>
+                </a:solidFill>
+                <a:latin typeface="Microsoft YaHei"/>
+              </a:defRPr>
+            </a:pPr>
+            <a:r>
+              <a:t>汇报完毕，敬请各位专家批评指正</a:t>
+            </a:r>
+          </a:p>
+        </p:txBody>
+      </p:sp>
+      <p:sp>
+        <p:nvSpPr>
+          <p:cNvPr id="3" name="TextBox 2"/>
+          <p:cNvSpPr txBox="1"/>
+          <p:nvPr/>
+        </p:nvSpPr>
+        <p:spPr>
+          <a:xfrm>
+            <a:off x="640080" y="749808"/>
+            <a:ext cx="9875520" cy="274320"/>
+          </a:xfrm>
+          <a:prstGeom prst="rect">
+            <a:avLst/>
+          </a:prstGeom>
+          <a:noFill/>
+        </p:spPr>
+        <p:txBody>
+          <a:bodyPr wrap="square" lIns="0" rIns="0" tIns="0" bIns="0">
+            <a:spAutoFit/>
+          </a:bodyPr>
+          <a:lstStyle/>
+          <a:p>
+            <a:pPr>
+              <a:defRPr sz="1200">
+                <a:solidFill>
+                  <a:srgbClr val="6B7785"/>
+                </a:solidFill>
+                <a:latin typeface="Microsoft YaHei"/>
+              </a:defRPr>
+            </a:pPr>
+            <a:r>
+              <a:t>KVC 统一异构存储池关键技术优化与验证进展汇报 · Q&amp;A 问答与研讨交流</a:t>
+            </a:r>
+          </a:p>
+        </p:txBody>
+      </p:sp>
+      <p:sp>
+        <p:nvSpPr>
+          <p:cNvPr id="4" name="TextBox 3"/>
+          <p:cNvSpPr txBox="1"/>
+          <p:nvPr/>
+        </p:nvSpPr>
+        <p:spPr>
+          <a:xfrm>
+            <a:off x="10607040" y="320040"/>
+            <a:ext cx="1005840" cy="274320"/>
+          </a:xfrm>
+          <a:prstGeom prst="rect">
+            <a:avLst/>
+          </a:prstGeom>
+          <a:noFill/>
+        </p:spPr>
+        <p:txBody>
+          <a:bodyPr wrap="none" lIns="0" rIns="0" tIns="0" bIns="0">
+            <a:spAutoFit/>
+          </a:bodyPr>
+          <a:lstStyle/>
+          <a:p>
+            <a:pPr algn="r">
+              <a:defRPr sz="1300" b="1">
+                <a:solidFill>
+                  <a:srgbClr val="6B7785"/>
+                </a:solidFill>
+                <a:latin typeface="Microsoft YaHei"/>
+              </a:defRPr>
+            </a:pPr>
+            <a:r>
+              <a:t>09 / 09</a:t>
             </a:r>
           </a:p>
         </p:txBody>
@@ -17935,7 +19082,7 @@
               </a:defRPr>
             </a:pPr>
             <a:r>
-              <a:t>03 · 阶段性成果与规范化记录</a:t>
+              <a:t>03 · 阶段性成果与元数据理论外证</a:t>
             </a:r>
           </a:p>
           <a:p>
@@ -17951,7 +19098,7 @@
               </a:defRPr>
             </a:pPr>
             <a:r>
-              <a:t>【落地成效：控制面成效显著 · 数据面紧密推进】</a:t>
+              <a:t>【落地成效：实测检索提升 &gt;30% · 理论外证双闭环】</a:t>
             </a:r>
           </a:p>
           <a:p>
@@ -17979,7 +19126,7 @@
                 </a:solidFill>
                 <a:latin typeface="Microsoft YaHei"/>
               </a:rPr>
-              <a:t>利用 UB 直通重构元数据，实测前缀匹配表检索提升 30% 以上，并探明 50% 复用率协议加速边界。</a:t>
+              <a:t>利用 UB 直通重构元数据，实测前缀检索提升 30% 以上，并探明 50% 复用率协议加速边界。</a:t>
             </a:r>
           </a:p>
           <a:p>
@@ -17998,7 +19145,7 @@
                 </a:solidFill>
                 <a:latin typeface="Microsoft YaHei"/>
               </a:rPr>
-              <a:t>• 标准规范化闭环： </a:t>
+              <a:t>• 理论与外证闭环： </a:t>
             </a:r>
             <a:r>
               <a:rPr sz="950">
@@ -18007,7 +19154,7 @@
                 </a:solidFill>
                 <a:latin typeface="Microsoft YaHei"/>
               </a:rPr>
-              <a:t>正文数据面通道紧密推进中；制定标准记录规范模板，后续成果严格对齐基线与量化分位。</a:t>
+              <a:t>建立 CMR/利用率排队模型证明容量提升 42.9%，并引入 NVIDIA Flash Indexer 工业实测客观对齐。</a:t>
             </a:r>
           </a:p>
         </p:txBody>
@@ -18132,7 +19279,7 @@
                 </a:solidFill>
                 <a:latin typeface="Microsoft YaHei"/>
               </a:rPr>
-              <a:t>四步逻辑链严密推导典型模型 (Llama-3-70B, TP=8) 在元数据直通控延、动态选路防反噬与硬件隔离上的确定性收益。</a:t>
+              <a:t>四步逻辑链严密推导 Llama-3-70B 在动态选路防反噬与硬件 QoS 隔离上的确定性收益区间与仿真曲线。</a:t>
             </a:r>
           </a:p>
           <a:p>
